--- a/presentation/final.pptx
+++ b/presentation/final.pptx
@@ -121,7 +121,7 @@
   <p:extLst>
     <p:ext uri="{521415D9-36F7-43E2-AB2F-B90AF26B5E84}">
       <p14:sectionLst xmlns:p14="http://schemas.microsoft.com/office/powerpoint/2010/main">
-        <p14:section name="Выступление" id="{1c5d1273-e943-9b9f-0c7e-2a6869aefa1e}">
+        <p14:section name="Выступление" id="{eab539d5-fec0-a147-ada0-af6c0c5f2e9c}">
           <p14:sldIdLst>
             <p14:sldId id="256"/>
             <p14:sldId id="257"/>
@@ -133,7 +133,7 @@
             <p14:sldId id="263"/>
           </p14:sldIdLst>
         </p14:section>
-        <p14:section name="Приложение: к вопросам жюри" id="{02547484-8bc2-372e-ae60-60f964a75cb4}">
+        <p14:section name="Приложение: к вопросам жюри" id="{3b571272-7fb0-213f-6de9-076b3dc98ae4}">
           <p14:sldIdLst>
             <p14:sldId id="264"/>
             <p14:sldId id="265"/>
@@ -7269,7 +7269,7 @@
                   <a:schemeClr val="tx2"/>
                 </a:solidFill>
               </a:rPr>
-              <a:t>Показ: на 31-й секунде дорожает грунт — робот меряет расход; на 42-й шумит датчик — вывод «сбой», ждёт 36 с</a:t>
+              <a:t>Показ: на 42-й секунде шумит датчик — вывод «сбой», ждёт 36 с; на 31-й дорожает грунт — меряет расход (в 3 прогонах из 5)</a:t>
             </a:r>
             <a:endParaRPr lang="en-US" sz="1500" dirty="0"/>
           </a:p>

--- a/presentation/final.pptx
+++ b/presentation/final.pptx
@@ -121,7 +121,7 @@
   <p:extLst>
     <p:ext uri="{521415D9-36F7-43E2-AB2F-B90AF26B5E84}">
       <p14:sectionLst xmlns:p14="http://schemas.microsoft.com/office/powerpoint/2010/main">
-        <p14:section name="Выступление" id="{eab539d5-fec0-a147-ada0-af6c0c5f2e9c}">
+        <p14:section name="Выступление" id="{197d44b5-ab9b-ebd4-af09-fabfeae1bf1c}">
           <p14:sldIdLst>
             <p14:sldId id="256"/>
             <p14:sldId id="257"/>
@@ -133,7 +133,7 @@
             <p14:sldId id="263"/>
           </p14:sldIdLst>
         </p14:section>
-        <p14:section name="Приложение: к вопросам жюри" id="{3b571272-7fb0-213f-6de9-076b3dc98ae4}">
+        <p14:section name="Приложение: к вопросам жюри" id="{de87b1e1-d169-759a-2192-cfa316692a4c}">
           <p14:sldIdLst>
             <p14:sldId id="264"/>
             <p14:sldId id="265"/>
@@ -724,7 +724,7 @@
           <a:p>
             <a:r>
               <a:rPr lang="en-US" dirty="0"/>
-              <a:t>Уровни с нулевого по третий выполнены. На четвёртом адаптация показана вживую и даёт очки там, где робот распознаёт сбой датчика; реакция на грунт выигрыша не дала.</a:t>
+              <a:t>Уровни с нулевого по третий выполнены. На четвёртом адаптация показана вживую и даёт очки там, где робот распознаёт сбой датчика; по реакции на грунт выигрыш не показан.</a:t>
             </a:r>
             <a:endParaRPr lang="en-US" dirty="0"/>
           </a:p>
@@ -812,7 +812,7 @@
           <a:p>
             <a:r>
               <a:rPr lang="en-US" dirty="0"/>
-              <a:t>По каждому критерию — чем он закрыт и где слабое место. Самые слабые места: реакция на грунт очков не даёт, а гипотезы робота выдвигает программа, а не языковая модель.</a:t>
+              <a:t>По каждому критерию — чем он закрыт и где слабое место. Самые слабые места: по реакции на грунт выигрыш не показан, а гипотезы робота выдвигает программа, а не языковая модель.</a:t>
             </a:r>
             <a:endParaRPr lang="en-US" dirty="0"/>
           </a:p>
@@ -1164,7 +1164,7 @@
           <a:p>
             <a:r>
               <a:rPr lang="en-US" dirty="0"/>
-              <a:t>Образцы, дорогой грунт и опасные зоны скрыты, камеры нет. Гипотеза: робот, который сверяет ожидания с датчиком и батареей, наберёт больше, чем робот с планом заранее. Подтвердилось: плюс тринадцать очков. А реакция на грунт очков не дала.</a:t>
+              <a:t>Образцы, дорогой грунт и опасные зоны скрыты, камеры нет. Гипотеза: робот, который сверяет ожидания с датчиком и батареей, наберёт больше, чем робот с планом заранее. Подтвердилось: плюс тринадцать очков. А по реакции на грунт выигрыш не показан.</a:t>
             </a:r>
             <a:endParaRPr lang="en-US" dirty="0"/>
           </a:p>
@@ -1340,7 +1340,7 @@
           <a:p>
             <a:r>
               <a:rPr lang="en-US" dirty="0"/>
-              <a:t>Трудный уровень, быстрый симулятор: 75 очков, а с распознаванием сбоя датчика — 81 при потолке 92 с половиной. Четыре идеи выигрыша не показали, и это тоже результат. В Gazebo показной сценарий пройден пять раз из пяти.</a:t>
+              <a:t>Трудный уровень, быстрый симулятор: 75 очков, а с распознаванием сбоя датчика — 81. Агент, которому заранее сообщили всё скрытое, набирает 92 с половиной. Четыре идеи выигрыша не показали, и это тоже результат. В Gazebo показной сценарий пройден пять раз из пяти.</a:t>
             </a:r>
             <a:endParaRPr lang="en-US" dirty="0"/>
           </a:p>
@@ -4567,7 +4567,7 @@
                   <a:schemeClr val="tx2"/>
                 </a:solidFill>
               </a:rPr>
-              <a:t>ждать на месте — минус 73 очка</a:t>
+              <a:t>имитатор, задержка 15 с; стоять: −73 очка</a:t>
             </a:r>
             <a:endParaRPr lang="en-US" sz="1400" dirty="0"/>
           </a:p>
@@ -4932,7 +4932,7 @@
                   <a:schemeClr val="tx2"/>
                 </a:solidFill>
               </a:rPr>
-              <a:t>на имитаторе 30,3 → 72,3; выключено</a:t>
+              <a:t>другой опыт на имитаторе: 30,3 → 72,3 (+42)</a:t>
             </a:r>
             <a:endParaRPr lang="en-US" sz="1400" dirty="0"/>
           </a:p>
@@ -7305,7 +7305,7 @@
                   <a:schemeClr val="tx2"/>
                 </a:solidFill>
               </a:rPr>
-              <a:t>Очки даёт распознавание сбоя датчика (+6,4); реакция на грунт — нет</a:t>
+              <a:t>Очки даёт распознавание сбоя датчика (+6,4); по грунту выигрыш не показан (+1,0 [−3,6; +5,4])</a:t>
             </a:r>
             <a:endParaRPr lang="en-US" sz="1500" dirty="0"/>
           </a:p>
@@ -7654,7 +7654,7 @@
                   <a:schemeClr val="tx2"/>
                 </a:solidFill>
               </a:rPr>
-              <a:t>Трудный уровень: 81,3 очка при потолке 92,5 (быстрый симулятор); показной сценарий в Gazebo — 5 из 5, счёт 90,8–91,9</a:t>
+              <a:t>Трудный уровень: 81,3 очка; с полными подсказками — 92,5 (другие сценарии); показной сценарий в Gazebo — 5 из 5, счёт 90,8–91,9</a:t>
             </a:r>
             <a:endParaRPr lang="en-US" sz="1400" dirty="0"/>
           </a:p>
@@ -7690,7 +7690,7 @@
                   <a:schemeClr val="tx2"/>
                 </a:solidFill>
               </a:rPr>
-              <a:t>До потолка 11 очков; пять правок их не вернули</a:t>
+              <a:t>Недобор смешанный; пять правок при базовых правилах выигрыша не показали</a:t>
             </a:r>
             <a:endParaRPr lang="en-US" sz="1400" dirty="0"/>
           </a:p>
@@ -7821,7 +7821,7 @@
                   <a:schemeClr val="tx2"/>
                 </a:solidFill>
               </a:rPr>
-              <a:t>Реакция на грунт и его смену очков не даёт</a:t>
+              <a:t>По реакции на грунт и его смену выигрыш не показан</a:t>
             </a:r>
             <a:endParaRPr lang="en-US" sz="1400" dirty="0"/>
           </a:p>
@@ -7952,7 +7952,7 @@
                   <a:schemeClr val="tx2"/>
                 </a:solidFill>
               </a:rPr>
-              <a:t>Обычной миссии модель ничего не добавляет; ответ идёт 15 с и дольше</a:t>
+              <a:t>На обычной миссии выигрыш от модели не показан; ответ идёт 15 с и дольше</a:t>
             </a:r>
             <a:endParaRPr lang="en-US" sz="1400" dirty="0"/>
           </a:p>
@@ -9195,7 +9195,7 @@
                   <a:schemeClr val="tx1"/>
                 </a:solidFill>
               </a:rPr>
-              <a:t>Пять правок по разбору потерь</a:t>
+              <a:t>Пять правок, базовые правила</a:t>
             </a:r>
             <a:endParaRPr lang="en-US" sz="1300" dirty="0"/>
           </a:p>
@@ -9303,7 +9303,7 @@
                   <a:schemeClr val="accent5"/>
                 </a:solidFill>
               </a:rPr>
-              <a:t>выигрыша нет</a:t>
+              <a:t>выигрыш не показан</a:t>
             </a:r>
             <a:endParaRPr lang="en-US" sz="1300" dirty="0"/>
           </a:p>
@@ -9529,7 +9529,7 @@
                   <a:schemeClr val="tx1"/>
                 </a:solidFill>
               </a:rPr>
-              <a:t>Потолок: агент знает всё заранее</a:t>
+              <a:t>Агент с полными подсказками</a:t>
             </a:r>
             <a:endParaRPr lang="en-US" sz="1300" dirty="0"/>
           </a:p>
@@ -9601,7 +9601,7 @@
                   <a:schemeClr val="tx2"/>
                 </a:solidFill>
               </a:rPr>
-              <a:t>92,5; только места образцов — 87,8</a:t>
+              <a:t>92,5 против 73,3 без подсказок</a:t>
             </a:r>
             <a:endParaRPr lang="en-US" sz="1300" dirty="0"/>
           </a:p>
@@ -9637,7 +9637,7 @@
                   <a:schemeClr val="tx2"/>
                 </a:solidFill>
               </a:rPr>
-              <a:t>знание важнее порядка</a:t>
+              <a:t>оптимум не установлен</a:t>
             </a:r>
             <a:endParaRPr lang="en-US" sz="1300" dirty="0"/>
           </a:p>
@@ -9732,7 +9732,7 @@
                   <a:schemeClr val="tx2"/>
                 </a:solidFill>
               </a:rPr>
-              <a:t>80 сценариев</a:t>
+              <a:t>80 сцен., 2 набора правил</a:t>
             </a:r>
             <a:endParaRPr lang="en-US" sz="1300" dirty="0"/>
           </a:p>
@@ -9804,7 +9804,7 @@
                   <a:schemeClr val="tx2"/>
                 </a:solidFill>
               </a:rPr>
-              <a:t>счёт тот же</a:t>
+              <a:t>на счёт — не показано</a:t>
             </a:r>
             <a:endParaRPr lang="en-US" sz="1300" dirty="0"/>
           </a:p>
@@ -10364,7 +10364,7 @@
                   <a:schemeClr val="tx1"/>
                 </a:solidFill>
               </a:rPr>
-              <a:t>Ожидание ответа модели 15 с</a:t>
+              <a:t>Стоять, пока модель думает 15 с</a:t>
             </a:r>
             <a:endParaRPr lang="en-US" sz="1300" dirty="0"/>
           </a:p>
@@ -10400,7 +10400,7 @@
                   <a:schemeClr val="tx2"/>
                 </a:solidFill>
               </a:rPr>
-              <a:t>трудный, 20 сценариев</a:t>
+              <a:t>имитатор (R3), 20 сцен.</a:t>
             </a:r>
             <a:endParaRPr lang="en-US" sz="1300" dirty="0"/>
           </a:p>
@@ -10531,7 +10531,7 @@
                   <a:schemeClr val="tx1"/>
                 </a:solidFill>
               </a:rPr>
-              <a:t>Ехать, пока модель думает</a:t>
+              <a:t>Ехать, пока модель думает 15 с</a:t>
             </a:r>
             <a:endParaRPr lang="en-US" sz="1300" dirty="0"/>
           </a:p>
@@ -10567,7 +10567,7 @@
                   <a:schemeClr val="tx2"/>
                 </a:solidFill>
               </a:rPr>
-              <a:t>имитатор, 40 сценариев</a:t>
+              <a:t>имитатор (R16), 40 сцен.</a:t>
             </a:r>
             <a:endParaRPr lang="en-US" sz="1300" dirty="0"/>
           </a:p>
@@ -11220,7 +11220,7 @@
                   <a:schemeClr val="bg1"/>
                 </a:solidFill>
               </a:rPr>
-              <a:t>Модель вживую на показе: режим «ехать, пока модель думает» есть, но измерен только на имитаторе и по умолчанию выключен</a:t>
+              <a:t>Модель на показе не решает: цена ожидания (−73) и режим «ехать, пока она думает» (+42) измерены на имитаторе модели, задержка 15 с</a:t>
             </a:r>
             <a:endParaRPr lang="en-US" sz="1600" dirty="0"/>
           </a:p>
@@ -11256,7 +11256,7 @@
                   <a:schemeClr val="bg1"/>
                 </a:solidFill>
               </a:rPr>
-              <a:t>Реакция на грунт и на его смену очков не даёт; исправление оставлено выключенным</a:t>
+              <a:t>По реакции на грунт и на его смену выигрыш не показан; исправление оставлено выключенным</a:t>
             </a:r>
             <a:endParaRPr lang="en-US" sz="1600" dirty="0"/>
           </a:p>
@@ -11292,7 +11292,7 @@
                   <a:schemeClr val="bg1"/>
                 </a:solidFill>
               </a:rPr>
-              <a:t>До потолка остаётся 11 очков: пять правок их не вернули, причины смешанные</a:t>
+              <a:t>Недобор остаётся смешанным: первый въезд в невидимую зону, несобранные образцы, расход заряда</a:t>
             </a:r>
             <a:endParaRPr lang="en-US" sz="1600" dirty="0"/>
           </a:p>
@@ -13019,7 +13019,7 @@
         <p:spPr>
           <a:xfrm>
             <a:off x="548640" y="1691640"/>
-            <a:ext cx="1874520" cy="274320"/>
+            <a:ext cx="1737360" cy="274320"/>
           </a:xfrm>
           <a:prstGeom prst="rect">
             <a:avLst/>
@@ -13040,7 +13040,7 @@
                   <a:schemeClr val="tx1"/>
                 </a:solidFill>
               </a:rPr>
-              <a:t>Как на самом деле</a:t>
+              <a:t>На самом деле</a:t>
             </a:r>
             <a:endParaRPr lang="en-US" sz="1600" dirty="0"/>
           </a:p>
@@ -13063,7 +13063,7 @@
         <p:spPr>
           <a:xfrm>
             <a:off x="548640" y="2002536"/>
-            <a:ext cx="1874520" cy="1795790"/>
+            <a:ext cx="1737360" cy="1664391"/>
           </a:xfrm>
           <a:prstGeom prst="rect">
             <a:avLst/>
@@ -13078,8 +13078,8 @@
         </p:nvSpPr>
         <p:spPr>
           <a:xfrm>
-            <a:off x="548640" y="3834902"/>
-            <a:ext cx="1874520" cy="219456"/>
+            <a:off x="548640" y="3703503"/>
+            <a:ext cx="1737360" cy="219456"/>
           </a:xfrm>
           <a:prstGeom prst="rect">
             <a:avLst/>
@@ -13114,8 +13114,8 @@
         </p:nvSpPr>
         <p:spPr>
           <a:xfrm>
-            <a:off x="2606040" y="1691640"/>
-            <a:ext cx="1874520" cy="274320"/>
+            <a:off x="2468880" y="1691640"/>
+            <a:ext cx="1737360" cy="274320"/>
           </a:xfrm>
           <a:prstGeom prst="rect">
             <a:avLst/>
@@ -13158,8 +13158,8 @@
         </p:blipFill>
         <p:spPr>
           <a:xfrm>
-            <a:off x="2606040" y="2002536"/>
-            <a:ext cx="1874520" cy="1795790"/>
+            <a:off x="2468880" y="2002536"/>
+            <a:ext cx="1737360" cy="1664391"/>
           </a:xfrm>
           <a:prstGeom prst="rect">
             <a:avLst/>
@@ -13174,8 +13174,8 @@
         </p:nvSpPr>
         <p:spPr>
           <a:xfrm>
-            <a:off x="2606040" y="3834902"/>
-            <a:ext cx="1874520" cy="219456"/>
+            <a:off x="2468880" y="3703503"/>
+            <a:ext cx="1737360" cy="219456"/>
           </a:xfrm>
           <a:prstGeom prst="rect">
             <a:avLst/>
@@ -13210,8 +13210,8 @@
         </p:nvSpPr>
         <p:spPr>
           <a:xfrm>
-            <a:off x="4800600" y="1691640"/>
-            <a:ext cx="6839712" cy="1572768"/>
+            <a:off x="4526280" y="1691640"/>
+            <a:ext cx="7114032" cy="1572768"/>
           </a:xfrm>
           <a:prstGeom prst="roundRect">
             <a:avLst>
@@ -13232,8 +13232,8 @@
         </p:nvSpPr>
         <p:spPr>
           <a:xfrm>
-            <a:off x="5029200" y="1691640"/>
-            <a:ext cx="6382512" cy="1572768"/>
+            <a:off x="4754880" y="1691640"/>
+            <a:ext cx="6656832" cy="1572768"/>
           </a:xfrm>
           <a:prstGeom prst="rect">
             <a:avLst/>
@@ -13279,8 +13279,8 @@
         </p:nvSpPr>
         <p:spPr>
           <a:xfrm>
-            <a:off x="4800600" y="3392424"/>
-            <a:ext cx="1965960" cy="661934"/>
+            <a:off x="4526280" y="3392424"/>
+            <a:ext cx="1965960" cy="530535"/>
           </a:xfrm>
           <a:prstGeom prst="rect">
             <a:avLst/>
@@ -13315,12 +13315,12 @@
         </p:nvSpPr>
         <p:spPr>
           <a:xfrm>
-            <a:off x="6858000" y="3392424"/>
-            <a:ext cx="989838" cy="661934"/>
+            <a:off x="6583680" y="3392424"/>
+            <a:ext cx="1058418" cy="530535"/>
           </a:xfrm>
           <a:prstGeom prst="roundRect">
             <a:avLst>
-              <a:gd name="adj" fmla="val 11051"/>
+              <a:gd name="adj" fmla="val 13788"/>
             </a:avLst>
           </a:prstGeom>
           <a:solidFill>
@@ -13337,8 +13337,8 @@
         </p:nvSpPr>
         <p:spPr>
           <a:xfrm>
-            <a:off x="6858000" y="3392424"/>
-            <a:ext cx="989838" cy="661934"/>
+            <a:off x="6583680" y="3392424"/>
+            <a:ext cx="1058418" cy="530535"/>
           </a:xfrm>
           <a:prstGeom prst="rect">
             <a:avLst/>
@@ -13373,7 +13373,7 @@
         </p:nvSpPr>
         <p:spPr>
           <a:xfrm>
-            <a:off x="7884414" y="3723391"/>
+            <a:off x="7678674" y="3657691"/>
             <a:ext cx="201168" cy="0"/>
           </a:xfrm>
           <a:prstGeom prst="line">
@@ -13398,12 +13398,12 @@
         </p:nvSpPr>
         <p:spPr>
           <a:xfrm>
-            <a:off x="8122158" y="3392424"/>
-            <a:ext cx="989838" cy="661934"/>
+            <a:off x="7916418" y="3392424"/>
+            <a:ext cx="1058418" cy="530535"/>
           </a:xfrm>
           <a:prstGeom prst="roundRect">
             <a:avLst>
-              <a:gd name="adj" fmla="val 11051"/>
+              <a:gd name="adj" fmla="val 13788"/>
             </a:avLst>
           </a:prstGeom>
           <a:solidFill>
@@ -13420,8 +13420,8 @@
         </p:nvSpPr>
         <p:spPr>
           <a:xfrm>
-            <a:off x="8122158" y="3392424"/>
-            <a:ext cx="989838" cy="661934"/>
+            <a:off x="7916418" y="3392424"/>
+            <a:ext cx="1058418" cy="530535"/>
           </a:xfrm>
           <a:prstGeom prst="rect">
             <a:avLst/>
@@ -13456,7 +13456,7 @@
         </p:nvSpPr>
         <p:spPr>
           <a:xfrm>
-            <a:off x="9148572" y="3723391"/>
+            <a:off x="9011412" y="3657691"/>
             <a:ext cx="201168" cy="0"/>
           </a:xfrm>
           <a:prstGeom prst="line">
@@ -13481,12 +13481,12 @@
         </p:nvSpPr>
         <p:spPr>
           <a:xfrm>
-            <a:off x="9386316" y="3392424"/>
-            <a:ext cx="989838" cy="661934"/>
+            <a:off x="9249156" y="3392424"/>
+            <a:ext cx="1058418" cy="530535"/>
           </a:xfrm>
           <a:prstGeom prst="roundRect">
             <a:avLst>
-              <a:gd name="adj" fmla="val 11051"/>
+              <a:gd name="adj" fmla="val 13788"/>
             </a:avLst>
           </a:prstGeom>
           <a:solidFill>
@@ -13503,8 +13503,8 @@
         </p:nvSpPr>
         <p:spPr>
           <a:xfrm>
-            <a:off x="9386316" y="3392424"/>
-            <a:ext cx="989838" cy="661934"/>
+            <a:off x="9249156" y="3392424"/>
+            <a:ext cx="1058418" cy="530535"/>
           </a:xfrm>
           <a:prstGeom prst="rect">
             <a:avLst/>
@@ -13539,7 +13539,7 @@
         </p:nvSpPr>
         <p:spPr>
           <a:xfrm>
-            <a:off x="10412730" y="3723391"/>
+            <a:off x="10344150" y="3657691"/>
             <a:ext cx="201168" cy="0"/>
           </a:xfrm>
           <a:prstGeom prst="line">
@@ -13564,12 +13564,12 @@
         </p:nvSpPr>
         <p:spPr>
           <a:xfrm>
-            <a:off x="10650474" y="3392424"/>
-            <a:ext cx="989838" cy="661934"/>
+            <a:off x="10581894" y="3392424"/>
+            <a:ext cx="1058418" cy="530535"/>
           </a:xfrm>
           <a:prstGeom prst="roundRect">
             <a:avLst>
-              <a:gd name="adj" fmla="val 11051"/>
+              <a:gd name="adj" fmla="val 13788"/>
             </a:avLst>
           </a:prstGeom>
           <a:solidFill>
@@ -13586,8 +13586,8 @@
         </p:nvSpPr>
         <p:spPr>
           <a:xfrm>
-            <a:off x="10650474" y="3392424"/>
-            <a:ext cx="989838" cy="661934"/>
+            <a:off x="10581894" y="3392424"/>
+            <a:ext cx="1058418" cy="530535"/>
           </a:xfrm>
           <a:prstGeom prst="rect">
             <a:avLst/>
@@ -13622,12 +13622,12 @@
         </p:nvSpPr>
         <p:spPr>
           <a:xfrm>
-            <a:off x="548640" y="4237238"/>
-            <a:ext cx="3605784" cy="1980682"/>
+            <a:off x="548640" y="4105839"/>
+            <a:ext cx="3328416" cy="2112081"/>
           </a:xfrm>
           <a:prstGeom prst="roundRect">
             <a:avLst>
-              <a:gd name="adj" fmla="val 3693"/>
+              <a:gd name="adj" fmla="val 3464"/>
             </a:avLst>
           </a:prstGeom>
           <a:solidFill>
@@ -13644,8 +13644,8 @@
         </p:nvSpPr>
         <p:spPr>
           <a:xfrm>
-            <a:off x="548640" y="4346966"/>
-            <a:ext cx="64008" cy="1761226"/>
+            <a:off x="548640" y="4215567"/>
+            <a:ext cx="64008" cy="1892625"/>
           </a:xfrm>
           <a:prstGeom prst="rect">
             <a:avLst/>
@@ -13664,8 +13664,8 @@
         </p:nvSpPr>
         <p:spPr>
           <a:xfrm>
-            <a:off x="777240" y="4328678"/>
-            <a:ext cx="3194304" cy="310896"/>
+            <a:off x="777240" y="4197279"/>
+            <a:ext cx="2916936" cy="310896"/>
           </a:xfrm>
           <a:prstGeom prst="rect">
             <a:avLst/>
@@ -13700,8 +13700,8 @@
         </p:nvSpPr>
         <p:spPr>
           <a:xfrm>
-            <a:off x="777240" y="4694438"/>
-            <a:ext cx="3194304" cy="1212586"/>
+            <a:off x="777240" y="4563039"/>
+            <a:ext cx="2916936" cy="1343985"/>
           </a:xfrm>
           <a:prstGeom prst="rect">
             <a:avLst/>
@@ -13737,7 +13737,7 @@
         <p:spPr>
           <a:xfrm>
             <a:off x="777240" y="5925312"/>
-            <a:ext cx="3194304" cy="219456"/>
+            <a:ext cx="2916936" cy="219456"/>
           </a:xfrm>
           <a:prstGeom prst="rect">
             <a:avLst/>
@@ -13772,12 +13772,12 @@
         </p:nvSpPr>
         <p:spPr>
           <a:xfrm>
-            <a:off x="4291584" y="4237238"/>
-            <a:ext cx="3605784" cy="1980682"/>
+            <a:off x="4014216" y="4105839"/>
+            <a:ext cx="4160520" cy="2112081"/>
           </a:xfrm>
           <a:prstGeom prst="roundRect">
             <a:avLst>
-              <a:gd name="adj" fmla="val 3693"/>
+              <a:gd name="adj" fmla="val 3464"/>
             </a:avLst>
           </a:prstGeom>
           <a:solidFill>
@@ -13794,8 +13794,8 @@
         </p:nvSpPr>
         <p:spPr>
           <a:xfrm>
-            <a:off x="4291584" y="4346966"/>
-            <a:ext cx="64008" cy="1761226"/>
+            <a:off x="4014216" y="4215567"/>
+            <a:ext cx="64008" cy="1892625"/>
           </a:xfrm>
           <a:prstGeom prst="rect">
             <a:avLst/>
@@ -13814,8 +13814,8 @@
         </p:nvSpPr>
         <p:spPr>
           <a:xfrm>
-            <a:off x="4520184" y="4328678"/>
-            <a:ext cx="3194304" cy="310896"/>
+            <a:off x="4242816" y="4197279"/>
+            <a:ext cx="3749040" cy="310896"/>
           </a:xfrm>
           <a:prstGeom prst="rect">
             <a:avLst/>
@@ -13850,8 +13850,8 @@
         </p:nvSpPr>
         <p:spPr>
           <a:xfrm>
-            <a:off x="4520184" y="4694438"/>
-            <a:ext cx="3194304" cy="1212586"/>
+            <a:off x="4242816" y="4563039"/>
+            <a:ext cx="3749040" cy="1343985"/>
           </a:xfrm>
           <a:prstGeom prst="rect">
             <a:avLst/>
@@ -13872,7 +13872,7 @@
                   <a:schemeClr val="tx1"/>
                 </a:solidFill>
               </a:rPr>
-              <a:t>Подсказка о местах образцов даёт +14,5 очка, лучший порядок обхода — +1,6: дело в знании о среде, а не в маршруте.</a:t>
+              <a:t>Подсказка о местах образцов дала +14,5 очка, замена порядка обхода при известных местах — +1,6: в испытанных вариантах знание о среде весит больше порядка обхода.</a:t>
             </a:r>
             <a:endParaRPr lang="en-US" sz="1600" dirty="0"/>
           </a:p>
@@ -13886,8 +13886,8 @@
         </p:nvSpPr>
         <p:spPr>
           <a:xfrm>
-            <a:off x="4520184" y="5925312"/>
-            <a:ext cx="3194304" cy="219456"/>
+            <a:off x="4242816" y="5925312"/>
+            <a:ext cx="3749040" cy="219456"/>
           </a:xfrm>
           <a:prstGeom prst="rect">
             <a:avLst/>
@@ -13922,12 +13922,12 @@
         </p:nvSpPr>
         <p:spPr>
           <a:xfrm>
-            <a:off x="8034528" y="4237238"/>
-            <a:ext cx="3605784" cy="1980682"/>
+            <a:off x="8311896" y="4105839"/>
+            <a:ext cx="3328416" cy="2112081"/>
           </a:xfrm>
           <a:prstGeom prst="roundRect">
             <a:avLst>
-              <a:gd name="adj" fmla="val 3693"/>
+              <a:gd name="adj" fmla="val 3464"/>
             </a:avLst>
           </a:prstGeom>
           <a:solidFill>
@@ -13944,8 +13944,8 @@
         </p:nvSpPr>
         <p:spPr>
           <a:xfrm>
-            <a:off x="8034528" y="4346966"/>
-            <a:ext cx="64008" cy="1761226"/>
+            <a:off x="8311896" y="4215567"/>
+            <a:ext cx="64008" cy="1892625"/>
           </a:xfrm>
           <a:prstGeom prst="rect">
             <a:avLst/>
@@ -13964,8 +13964,8 @@
         </p:nvSpPr>
         <p:spPr>
           <a:xfrm>
-            <a:off x="8263128" y="4328678"/>
-            <a:ext cx="3194304" cy="310896"/>
+            <a:off x="8540496" y="4197279"/>
+            <a:ext cx="2916936" cy="310896"/>
           </a:xfrm>
           <a:prstGeom prst="rect">
             <a:avLst/>
@@ -14000,8 +14000,8 @@
         </p:nvSpPr>
         <p:spPr>
           <a:xfrm>
-            <a:off x="8263128" y="4694438"/>
-            <a:ext cx="3194304" cy="1212586"/>
+            <a:off x="8540496" y="4563039"/>
+            <a:ext cx="2916936" cy="1343985"/>
           </a:xfrm>
           <a:prstGeom prst="rect">
             <a:avLst/>
@@ -14022,7 +14022,7 @@
                   <a:schemeClr val="tx1"/>
                 </a:solidFill>
               </a:rPr>
-              <a:t>Реакция на грунт и на его смену очков не дала: +1,0 [−3,6; +5,4] и +0,02. По возврату на базу разницы с планом нет.</a:t>
+              <a:t>Реакция на грунт и на его смену: выигрыш не показан (+1,0 [−3,6; +5,4] и +0,02). По возврату на базу разницы с планом заранее нет.</a:t>
             </a:r>
             <a:endParaRPr lang="en-US" sz="1600" dirty="0"/>
           </a:p>
@@ -14036,8 +14036,8 @@
         </p:nvSpPr>
         <p:spPr>
           <a:xfrm>
-            <a:off x="8263128" y="5925312"/>
-            <a:ext cx="3194304" cy="219456"/>
+            <a:off x="8540496" y="5925312"/>
+            <a:ext cx="2916936" cy="219456"/>
           </a:xfrm>
           <a:prstGeom prst="rect">
             <a:avLst/>
@@ -15369,12 +15369,12 @@
               <a:buNone/>
             </a:pPr>
             <a:r>
-              <a:rPr lang="en-US" sz="3200" b="1" dirty="0">
+              <a:rPr lang="en-US" sz="2800" b="1" dirty="0">
                 <a:solidFill>
                   <a:schemeClr val="tx1"/>
                 </a:solidFill>
               </a:rPr>
-              <a:t>Трудный уровень: 81 очко при потолке 92,5</a:t>
+              <a:t>Трудный уровень: 81 очко; с полными подсказками — 92,5</a:t>
             </a:r>
             <a:endParaRPr lang="en-US" sz="3200" dirty="0"/>
           </a:p>
@@ -15412,7 +15412,7 @@
                   <a:schemeClr val="accent5"/>
                 </a:solidFill>
               </a:rPr>
-              <a:t>Быстрый симулятор, новые сценарии; отрезки — 95% интервалы. Внизу — проверка в Gazebo</a:t>
+              <a:t>Быстрый симулятор. Числа — из трёх опытов на разных наборах сценариев: между опытами столбцы не вычитать</a:t>
             </a:r>
             <a:endParaRPr lang="en-US" sz="1600" dirty="0"/>
           </a:p>
@@ -15448,7 +15448,7 @@
                   <a:schemeClr val="tx1"/>
                 </a:solidFill>
               </a:rPr>
-              <a:t>Счёт по вариантам агента</a:t>
+              <a:t>Счёт по вариантам агента: три разных опыта</a:t>
             </a:r>
             <a:endParaRPr lang="en-US" sz="1600" dirty="0"/>
           </a:p>
@@ -15456,7 +15456,7 @@
       </p:sp>
       <p:pic>
         <p:nvPicPr>
-          <p:cNvPr id="6" name="scores-chart" descr="Счёт на трудном уровне: план заранее 59,3; адаптивный агент 74,9; с распознаванием сбоя датчика 81,3; потолок 92,5">    </p:cNvPr>
+          <p:cNvPr id="6" name="scores-chart" descr="Счёт на трудном уровне, три опыта на разных наборах сценариев. Опыт E1: план заранее 59,3, адаптивный агент 72,7. Опыт P1, новые сценарии: адаптивный агент 74,9, с распознаванием сбоя датчика 81,3. Опыт A1, 160 других сценариев: адаптивный агент 73,3, агент с полными подсказками 92,5">    </p:cNvPr>
           <p:cNvPicPr>
             <a:picLocks noChangeAspect="1"/>
           </p:cNvPicPr>
@@ -15471,7 +15471,7 @@
         <p:spPr>
           <a:xfrm>
             <a:off x="548640" y="1984248"/>
-            <a:ext cx="5394960" cy="2926080"/>
+            <a:ext cx="5394960" cy="2743200"/>
           </a:xfrm>
           <a:prstGeom prst="rect">
             <a:avLst/>
@@ -15516,7 +15516,7 @@
       </p:sp>
       <p:pic>
         <p:nvPicPr>
-          <p:cNvPr id="8" name="effects-chart" descr="Прибавка к счёту: адаптация +13,3; распознавание сбоя датчика +6,4; новые схемы планирования −0,4; пять правок по разбору потерь −0,39; реакция на дорогой грунт +1,0; реакция на смену грунта +0,02">    </p:cNvPr>
+          <p:cNvPr id="8" name="effects-chart" descr="Прибавка к счёту: адаптация +13,3; распознавание сбоя датчика +6,4; новые схемы планирования −0,4; пять правок по разбору потерь при базовых правилах −0,39; реакция на дорогой грунт +1,0; реакция на смену грунта +0,02">    </p:cNvPr>
           <p:cNvPicPr>
             <a:picLocks noChangeAspect="1"/>
           </p:cNvPicPr>
@@ -15531,7 +15531,7 @@
         <p:spPr>
           <a:xfrm>
             <a:off x="6245352" y="1984248"/>
-            <a:ext cx="5394960" cy="2926080"/>
+            <a:ext cx="5394960" cy="2743200"/>
           </a:xfrm>
           <a:prstGeom prst="rect">
             <a:avLst/>
@@ -15546,12 +15546,12 @@
         </p:nvSpPr>
         <p:spPr>
           <a:xfrm>
-            <a:off x="548640" y="5001768"/>
-            <a:ext cx="3605784" cy="1216152"/>
+            <a:off x="548640" y="4818888"/>
+            <a:ext cx="3605784" cy="1399032"/>
           </a:xfrm>
           <a:prstGeom prst="roundRect">
             <a:avLst>
-              <a:gd name="adj" fmla="val 6015"/>
+              <a:gd name="adj" fmla="val 5229"/>
             </a:avLst>
           </a:prstGeom>
           <a:solidFill>
@@ -15568,8 +15568,8 @@
         </p:nvSpPr>
         <p:spPr>
           <a:xfrm>
-            <a:off x="749808" y="5047488"/>
-            <a:ext cx="3240024" cy="384048"/>
+            <a:off x="749808" y="4837176"/>
+            <a:ext cx="3240024" cy="365760"/>
           </a:xfrm>
           <a:prstGeom prst="rect">
             <a:avLst/>
@@ -15604,8 +15604,8 @@
         </p:nvSpPr>
         <p:spPr>
           <a:xfrm>
-            <a:off x="749808" y="5458968"/>
-            <a:ext cx="3240024" cy="484632"/>
+            <a:off x="749808" y="5212080"/>
+            <a:ext cx="3240024" cy="585216"/>
           </a:xfrm>
           <a:prstGeom prst="rect">
             <a:avLst/>
@@ -15626,7 +15626,7 @@
                   <a:schemeClr val="tx2"/>
                 </a:solidFill>
               </a:rPr>
-              <a:t>прогонов показа: 7 из 7 образцов, возврат, без штрафов, счёт 90,8–91,9</a:t>
+              <a:t>засчитанных прогонов показа (четыре 8.10 и репетиция 9.10): 7 из 7 образцов, возврат, без штрафов, счёт 90,8–91,9</a:t>
             </a:r>
             <a:endParaRPr lang="en-US" sz="1300" dirty="0"/>
           </a:p>
@@ -15640,17 +15640,17 @@
         </p:nvSpPr>
         <p:spPr>
           <a:xfrm>
-            <a:off x="749808" y="5952744"/>
-            <a:ext cx="3240024" cy="201168"/>
-          </a:xfrm>
-          <a:prstGeom prst="rect">
-            <a:avLst/>
-          </a:prstGeom>
-          <a:noFill/>
-          <a:ln/>
-        </p:spPr>
-        <p:txBody>
-          <a:bodyPr wrap="square" lIns="0" tIns="0" rIns="0" bIns="0" rtlCol="0" anchor="ctr"/>
+            <a:off x="749808" y="5824728"/>
+            <a:ext cx="3240024" cy="365760"/>
+          </a:xfrm>
+          <a:prstGeom prst="rect">
+            <a:avLst/>
+          </a:prstGeom>
+          <a:noFill/>
+          <a:ln/>
+        </p:spPr>
+        <p:txBody>
+          <a:bodyPr wrap="square" lIns="0" tIns="0" rIns="0" bIns="0" rtlCol="0" anchor="b"/>
           <a:lstStyle/>
           <a:p>
             <a:pPr algn="l" indent="0" marL="0">
@@ -15662,7 +15662,7 @@
                   <a:schemeClr val="accent5"/>
                 </a:solidFill>
               </a:rPr>
-              <a:t>Gazebo, трудный уровень, сценарий 2</a:t>
+              <a:t>Gazebo, сценарий 2; ещё два не засчитаны: машина была перегружена</a:t>
             </a:r>
             <a:endParaRPr lang="en-US" sz="1200" dirty="0"/>
           </a:p>
@@ -15676,12 +15676,12 @@
         </p:nvSpPr>
         <p:spPr>
           <a:xfrm>
-            <a:off x="4291584" y="5001768"/>
-            <a:ext cx="3605784" cy="1216152"/>
+            <a:off x="4291584" y="4818888"/>
+            <a:ext cx="3605784" cy="1399032"/>
           </a:xfrm>
           <a:prstGeom prst="roundRect">
             <a:avLst>
-              <a:gd name="adj" fmla="val 6015"/>
+              <a:gd name="adj" fmla="val 5229"/>
             </a:avLst>
           </a:prstGeom>
           <a:solidFill>
@@ -15698,8 +15698,8 @@
         </p:nvSpPr>
         <p:spPr>
           <a:xfrm>
-            <a:off x="4492752" y="5047488"/>
-            <a:ext cx="3240024" cy="384048"/>
+            <a:off x="4492752" y="4837176"/>
+            <a:ext cx="3240024" cy="365760"/>
           </a:xfrm>
           <a:prstGeom prst="rect">
             <a:avLst/>
@@ -15734,8 +15734,8 @@
         </p:nvSpPr>
         <p:spPr>
           <a:xfrm>
-            <a:off x="4492752" y="5458968"/>
-            <a:ext cx="3240024" cy="484632"/>
+            <a:off x="4492752" y="5212080"/>
+            <a:ext cx="3240024" cy="585216"/>
           </a:xfrm>
           <a:prstGeom prst="rect">
             <a:avLst/>
@@ -15770,17 +15770,17 @@
         </p:nvSpPr>
         <p:spPr>
           <a:xfrm>
-            <a:off x="4492752" y="5952744"/>
-            <a:ext cx="3240024" cy="201168"/>
-          </a:xfrm>
-          <a:prstGeom prst="rect">
-            <a:avLst/>
-          </a:prstGeom>
-          <a:noFill/>
-          <a:ln/>
-        </p:spPr>
-        <p:txBody>
-          <a:bodyPr wrap="square" lIns="0" tIns="0" rIns="0" bIns="0" rtlCol="0" anchor="ctr"/>
+            <a:off x="4492752" y="5824728"/>
+            <a:ext cx="3240024" cy="365760"/>
+          </a:xfrm>
+          <a:prstGeom prst="rect">
+            <a:avLst/>
+          </a:prstGeom>
+          <a:noFill/>
+          <a:ln/>
+        </p:spPr>
+        <p:txBody>
+          <a:bodyPr wrap="square" lIns="0" tIns="0" rIns="0" bIns="0" rtlCol="0" anchor="b"/>
           <a:lstStyle/>
           <a:p>
             <a:pPr algn="l" indent="0" marL="0">
@@ -15806,12 +15806,12 @@
         </p:nvSpPr>
         <p:spPr>
           <a:xfrm>
-            <a:off x="8034528" y="5001768"/>
-            <a:ext cx="3605784" cy="1216152"/>
+            <a:off x="8034528" y="4818888"/>
+            <a:ext cx="3605784" cy="1399032"/>
           </a:xfrm>
           <a:prstGeom prst="roundRect">
             <a:avLst>
-              <a:gd name="adj" fmla="val 6015"/>
+              <a:gd name="adj" fmla="val 5229"/>
             </a:avLst>
           </a:prstGeom>
           <a:solidFill>
@@ -15828,8 +15828,8 @@
         </p:nvSpPr>
         <p:spPr>
           <a:xfrm>
-            <a:off x="8235696" y="5047488"/>
-            <a:ext cx="3240024" cy="384048"/>
+            <a:off x="8235696" y="4837176"/>
+            <a:ext cx="3240024" cy="365760"/>
           </a:xfrm>
           <a:prstGeom prst="rect">
             <a:avLst/>
@@ -15864,8 +15864,8 @@
         </p:nvSpPr>
         <p:spPr>
           <a:xfrm>
-            <a:off x="8235696" y="5458968"/>
-            <a:ext cx="3240024" cy="484632"/>
+            <a:off x="8235696" y="5212080"/>
+            <a:ext cx="3240024" cy="585216"/>
           </a:xfrm>
           <a:prstGeom prst="rect">
             <a:avLst/>
@@ -15900,17 +15900,17 @@
         </p:nvSpPr>
         <p:spPr>
           <a:xfrm>
-            <a:off x="8235696" y="5952744"/>
-            <a:ext cx="3240024" cy="201168"/>
-          </a:xfrm>
-          <a:prstGeom prst="rect">
-            <a:avLst/>
-          </a:prstGeom>
-          <a:noFill/>
-          <a:ln/>
-        </p:spPr>
-        <p:txBody>
-          <a:bodyPr wrap="square" lIns="0" tIns="0" rIns="0" bIns="0" rtlCol="0" anchor="ctr"/>
+            <a:off x="8235696" y="5824728"/>
+            <a:ext cx="3240024" cy="365760"/>
+          </a:xfrm>
+          <a:prstGeom prst="rect">
+            <a:avLst/>
+          </a:prstGeom>
+          <a:noFill/>
+          <a:ln/>
+        </p:spPr>
+        <p:txBody>
+          <a:bodyPr wrap="square" lIns="0" tIns="0" rIns="0" bIns="0" rtlCol="0" anchor="b"/>
           <a:lstStyle/>
           <a:p>
             <a:pPr algn="l" indent="0" marL="0">
@@ -17770,11 +17770,11 @@
         <p:spPr>
           <a:xfrm>
             <a:off x="548640" y="1691640"/>
-            <a:ext cx="7754112" cy="1049274"/>
+            <a:ext cx="7754112" cy="893064"/>
           </a:xfrm>
           <a:prstGeom prst="roundRect">
             <a:avLst>
-              <a:gd name="adj" fmla="val 6972"/>
+              <a:gd name="adj" fmla="val 8191"/>
             </a:avLst>
           </a:prstGeom>
           <a:solidFill>
@@ -17828,7 +17828,7 @@
         <p:spPr>
           <a:xfrm>
             <a:off x="749808" y="2020824"/>
-            <a:ext cx="5239512" cy="701802"/>
+            <a:ext cx="5239512" cy="545592"/>
           </a:xfrm>
           <a:prstGeom prst="rect">
             <a:avLst/>
@@ -17863,8 +17863,8 @@
         </p:nvSpPr>
         <p:spPr>
           <a:xfrm>
-            <a:off x="6153912" y="1783080"/>
-            <a:ext cx="1965960" cy="475488"/>
+            <a:off x="6153912" y="1737360"/>
+            <a:ext cx="1965960" cy="438912"/>
           </a:xfrm>
           <a:prstGeom prst="rect">
             <a:avLst/>
@@ -17899,8 +17899,8 @@
         </p:nvSpPr>
         <p:spPr>
           <a:xfrm>
-            <a:off x="6153912" y="2276856"/>
-            <a:ext cx="1965960" cy="390906"/>
+            <a:off x="6153912" y="2185416"/>
+            <a:ext cx="1965960" cy="362712"/>
           </a:xfrm>
           <a:prstGeom prst="rect">
             <a:avLst/>
@@ -17935,12 +17935,12 @@
         </p:nvSpPr>
         <p:spPr>
           <a:xfrm>
-            <a:off x="548640" y="2850642"/>
-            <a:ext cx="7754112" cy="1049274"/>
+            <a:off x="548640" y="2694432"/>
+            <a:ext cx="7754112" cy="893064"/>
           </a:xfrm>
           <a:prstGeom prst="roundRect">
             <a:avLst>
-              <a:gd name="adj" fmla="val 6972"/>
+              <a:gd name="adj" fmla="val 8191"/>
             </a:avLst>
           </a:prstGeom>
           <a:solidFill>
@@ -17957,7 +17957,7 @@
         </p:nvSpPr>
         <p:spPr>
           <a:xfrm>
-            <a:off x="749808" y="2896362"/>
+            <a:off x="749808" y="2740152"/>
             <a:ext cx="5239512" cy="292608"/>
           </a:xfrm>
           <a:prstGeom prst="rect">
@@ -17993,8 +17993,8 @@
         </p:nvSpPr>
         <p:spPr>
           <a:xfrm>
-            <a:off x="749808" y="3179826"/>
-            <a:ext cx="5239512" cy="701802"/>
+            <a:off x="749808" y="3023616"/>
+            <a:ext cx="5239512" cy="545592"/>
           </a:xfrm>
           <a:prstGeom prst="rect">
             <a:avLst/>
@@ -18029,8 +18029,8 @@
         </p:nvSpPr>
         <p:spPr>
           <a:xfrm>
-            <a:off x="6153912" y="2942082"/>
-            <a:ext cx="1965960" cy="475488"/>
+            <a:off x="6153912" y="2740152"/>
+            <a:ext cx="1965960" cy="438912"/>
           </a:xfrm>
           <a:prstGeom prst="rect">
             <a:avLst/>
@@ -18065,8 +18065,8 @@
         </p:nvSpPr>
         <p:spPr>
           <a:xfrm>
-            <a:off x="6153912" y="3435858"/>
-            <a:ext cx="1965960" cy="390906"/>
+            <a:off x="6153912" y="3188208"/>
+            <a:ext cx="1965960" cy="362712"/>
           </a:xfrm>
           <a:prstGeom prst="rect">
             <a:avLst/>
@@ -18101,12 +18101,12 @@
         </p:nvSpPr>
         <p:spPr>
           <a:xfrm>
-            <a:off x="548640" y="4009644"/>
-            <a:ext cx="7754112" cy="1049274"/>
+            <a:off x="548640" y="3697224"/>
+            <a:ext cx="7754112" cy="1517904"/>
           </a:xfrm>
           <a:prstGeom prst="roundRect">
             <a:avLst>
-              <a:gd name="adj" fmla="val 6972"/>
+              <a:gd name="adj" fmla="val 4819"/>
             </a:avLst>
           </a:prstGeom>
           <a:solidFill>
@@ -18123,7 +18123,7 @@
         </p:nvSpPr>
         <p:spPr>
           <a:xfrm>
-            <a:off x="749808" y="4055364"/>
+            <a:off x="749808" y="3742944"/>
             <a:ext cx="5239512" cy="292608"/>
           </a:xfrm>
           <a:prstGeom prst="rect">
@@ -18159,8 +18159,8 @@
         </p:nvSpPr>
         <p:spPr>
           <a:xfrm>
-            <a:off x="749808" y="4338828"/>
-            <a:ext cx="5239512" cy="701802"/>
+            <a:off x="749808" y="4026408"/>
+            <a:ext cx="5239512" cy="1170432"/>
           </a:xfrm>
           <a:prstGeom prst="rect">
             <a:avLst/>
@@ -18181,7 +18181,7 @@
                   <a:schemeClr val="tx2"/>
                 </a:solidFill>
               </a:rPr>
-              <a:t>Подтверждённые гипотезы верны в 9 случаях из 10. Опыт выбирает самый дешёвый из различающих объяснения: расход на расследование 0,54 → 0,08 ед.; на счёт не влияет</a:t>
+              <a:t>Журнал (опыт E17, 320 прогонов): подтверждённые гипотезы верны в 9 случаях из 10. Выбор опыта (опыт E27, 80 сценариев при двух наборах правил): берёт самый дешёвый из различающих объяснения — расход на расследование 0,54 → 0,08 ед.; влияние на счёт не показано</a:t>
             </a:r>
             <a:endParaRPr lang="en-US" sz="1400" dirty="0"/>
           </a:p>
@@ -18195,8 +18195,8 @@
         </p:nvSpPr>
         <p:spPr>
           <a:xfrm>
-            <a:off x="6153912" y="4101084"/>
-            <a:ext cx="1965960" cy="475488"/>
+            <a:off x="6153912" y="3742944"/>
+            <a:ext cx="1965960" cy="438912"/>
           </a:xfrm>
           <a:prstGeom prst="rect">
             <a:avLst/>
@@ -18231,8 +18231,8 @@
         </p:nvSpPr>
         <p:spPr>
           <a:xfrm>
-            <a:off x="6153912" y="4594860"/>
-            <a:ext cx="1965960" cy="390906"/>
+            <a:off x="6153912" y="4191000"/>
+            <a:ext cx="1965960" cy="987552"/>
           </a:xfrm>
           <a:prstGeom prst="rect">
             <a:avLst/>
@@ -18253,7 +18253,7 @@
                   <a:schemeClr val="accent5"/>
                 </a:solidFill>
               </a:rPr>
-              <a:t>быстрый симулятор, 320 прогонов</a:t>
+              <a:t>быстрый симулятор; E17 — 320 прогонов, E27 — по 160 прогонов на вариант</a:t>
             </a:r>
             <a:endParaRPr lang="en-US" sz="1200" dirty="0"/>
           </a:p>
@@ -18267,12 +18267,12 @@
         </p:nvSpPr>
         <p:spPr>
           <a:xfrm>
-            <a:off x="548640" y="5168646"/>
-            <a:ext cx="7754112" cy="1049274"/>
+            <a:off x="548640" y="5324856"/>
+            <a:ext cx="7754112" cy="893064"/>
           </a:xfrm>
           <a:prstGeom prst="roundRect">
             <a:avLst>
-              <a:gd name="adj" fmla="val 6972"/>
+              <a:gd name="adj" fmla="val 8191"/>
             </a:avLst>
           </a:prstGeom>
           <a:solidFill>
@@ -18289,7 +18289,7 @@
         </p:nvSpPr>
         <p:spPr>
           <a:xfrm>
-            <a:off x="749808" y="5214366"/>
+            <a:off x="749808" y="5370576"/>
             <a:ext cx="5239512" cy="292608"/>
           </a:xfrm>
           <a:prstGeom prst="rect">
@@ -18325,8 +18325,8 @@
         </p:nvSpPr>
         <p:spPr>
           <a:xfrm>
-            <a:off x="749808" y="5497830"/>
-            <a:ext cx="5239512" cy="701802"/>
+            <a:off x="749808" y="5654040"/>
+            <a:ext cx="5239512" cy="545592"/>
           </a:xfrm>
           <a:prstGeom prst="rect">
             <a:avLst/>
@@ -18361,8 +18361,8 @@
         </p:nvSpPr>
         <p:spPr>
           <a:xfrm>
-            <a:off x="6153912" y="5260086"/>
-            <a:ext cx="1965960" cy="475488"/>
+            <a:off x="6153912" y="5370576"/>
+            <a:ext cx="1965960" cy="438912"/>
           </a:xfrm>
           <a:prstGeom prst="rect">
             <a:avLst/>
@@ -18397,8 +18397,8 @@
         </p:nvSpPr>
         <p:spPr>
           <a:xfrm>
-            <a:off x="6153912" y="5753862"/>
-            <a:ext cx="1965960" cy="390906"/>
+            <a:off x="6153912" y="5818632"/>
+            <a:ext cx="1965960" cy="362712"/>
           </a:xfrm>
           <a:prstGeom prst="rect">
             <a:avLst/>
@@ -20728,7 +20728,7 @@
                   <a:schemeClr val="tx1"/>
                 </a:solidFill>
               </a:rPr>
-              <a:t>241</a:t>
+              <a:t>253</a:t>
             </a:r>
             <a:endParaRPr lang="en-US" sz="2800" dirty="0"/>
           </a:p>
@@ -23876,7 +23876,7 @@
                   <a:schemeClr val="tx2"/>
                 </a:solidFill>
               </a:rPr>
-              <a:t>сбой датчика: +6,4; пять новых правок: −0,4</a:t>
+              <a:t>сбой датчика: +6,4; пять правок: не показано</a:t>
             </a:r>
             <a:endParaRPr lang="en-US" sz="1400" dirty="0"/>
           </a:p>
@@ -24149,7 +24149,7 @@
                   <a:schemeClr val="tx2"/>
                 </a:solidFill>
               </a:rPr>
-              <a:t>не лучше нынешней; потолок — 92,5 очка</a:t>
+              <a:t>не лучше нынешней; с подсказками — 92,5</a:t>
             </a:r>
             <a:endParaRPr lang="en-US" sz="1400" dirty="0"/>
           </a:p>

--- a/presentation/final.pptx
+++ b/presentation/final.pptx
@@ -121,7 +121,7 @@
   <p:extLst>
     <p:ext uri="{521415D9-36F7-43E2-AB2F-B90AF26B5E84}">
       <p14:sectionLst xmlns:p14="http://schemas.microsoft.com/office/powerpoint/2010/main">
-        <p14:section name="Выступление" id="{197d44b5-ab9b-ebd4-af09-fabfeae1bf1c}">
+        <p14:section name="Выступление" id="{225e0957-a9f8-4863-eb68-50c47ef2a6c4}">
           <p14:sldIdLst>
             <p14:sldId id="256"/>
             <p14:sldId id="257"/>
@@ -133,7 +133,7 @@
             <p14:sldId id="263"/>
           </p14:sldIdLst>
         </p14:section>
-        <p14:section name="Приложение: к вопросам жюри" id="{de87b1e1-d169-759a-2192-cfa316692a4c}">
+        <p14:section name="Приложение: к вопросам жюри" id="{09e55228-0d45-3fa2-94cf-608e8969a91b}">
           <p14:sldIdLst>
             <p14:sldId id="264"/>
             <p14:sldId id="265"/>
@@ -636,7 +636,7 @@
           <a:p>
             <a:r>
               <a:rPr lang="en-US" dirty="0"/>
-              <a:t>Продолжение: защита в Gazebo, языковая модель и бонусные треки. Последний значок инженера перед галочкой — правка ведущего агента. Всего 27 кругов ревью по 15 работам, и ни одна работа не прошла ревью с первого раза.</a:t>
+              <a:t>Продолжение: защита в Gazebo, языковая модель и бонусные треки. Последний значок инженера перед галочкой — правка ведущего агента. Всего 32 круга ревью по 20 работам; 19 из них ревью вернуло на исправления.</a:t>
             </a:r>
             <a:endParaRPr lang="en-US" dirty="0"/>
           </a:p>
@@ -1604,7 +1604,7 @@
           <a:p>
             <a:r>
               <a:rPr lang="en-US" dirty="0"/>
-              <a:t>Работали как лаборатория: человек задаёт цель и роли, агенты пишут код и ставят опыты. Каждую работу до приёма читает независимая модель. Ни одна не прошла ревью с первого раза.</a:t>
+              <a:t>Работали как лаборатория: человек задаёт цель и роли, агенты пишут код и ставят опыты. Каждую работу до приёма читает независимая модель. 19 работ из 20 она вернула на исправления.</a:t>
             </a:r>
             <a:endParaRPr lang="en-US" dirty="0"/>
           </a:p>
@@ -2864,7 +2864,7 @@
       </p:sp>
       <p:pic>
         <p:nvPicPr>
-          <p:cNvPr id="6" name="legend-1-chip" descr="/Users/a/MAI/DID-research/FIN/presentation/assets/logos/gemini.png">    </p:cNvPr>
+          <p:cNvPr id="6" name="legend-1-chip" descr="/Users/a/MAI/DID/presentation/assets/logos/gemini.png">    </p:cNvPr>
           <p:cNvPicPr>
             <a:picLocks noChangeAspect="1"/>
           </p:cNvPicPr>
@@ -2946,7 +2946,7 @@
       </p:sp>
       <p:pic>
         <p:nvPicPr>
-          <p:cNvPr id="9" name="legend-2-chip" descr="/Users/a/MAI/DID-research/FIN/presentation/assets/logos/claude.png">    </p:cNvPr>
+          <p:cNvPr id="9" name="legend-2-chip" descr="/Users/a/MAI/DID/presentation/assets/logos/claude.png">    </p:cNvPr>
           <p:cNvPicPr>
             <a:picLocks noChangeAspect="1"/>
           </p:cNvPicPr>
@@ -3028,7 +3028,7 @@
       </p:sp>
       <p:pic>
         <p:nvPicPr>
-          <p:cNvPr id="12" name="legend-3-chip" descr="/Users/a/MAI/DID-research/FIN/presentation/assets/logos/openai.png">    </p:cNvPr>
+          <p:cNvPr id="12" name="legend-3-chip" descr="/Users/a/MAI/DID/presentation/assets/logos/openai.png">    </p:cNvPr>
           <p:cNvPicPr>
             <a:picLocks noChangeAspect="1"/>
           </p:cNvPicPr>
@@ -3317,7 +3317,7 @@
       </p:sp>
       <p:pic>
         <p:nvPicPr>
-          <p:cNvPr id="21" name="lane-1-chip-1" descr="/Users/a/MAI/DID-research/FIN/presentation/assets/logos/claude.png">    </p:cNvPr>
+          <p:cNvPr id="21" name="lane-1-chip-1" descr="/Users/a/MAI/DID/presentation/assets/logos/claude.png">    </p:cNvPr>
           <p:cNvPicPr>
             <a:picLocks noChangeAspect="1"/>
           </p:cNvPicPr>
@@ -3363,7 +3363,7 @@
       </p:sp>
       <p:pic>
         <p:nvPicPr>
-          <p:cNvPr id="23" name="lane-1-chip-2" descr="/Users/a/MAI/DID-research/FIN/presentation/assets/logos/openai.png">    </p:cNvPr>
+          <p:cNvPr id="23" name="lane-1-chip-2" descr="/Users/a/MAI/DID/presentation/assets/logos/openai.png">    </p:cNvPr>
           <p:cNvPicPr>
             <a:picLocks noChangeAspect="1"/>
           </p:cNvPicPr>
@@ -3409,7 +3409,7 @@
       </p:sp>
       <p:pic>
         <p:nvPicPr>
-          <p:cNvPr id="25" name="lane-1-chip-3" descr="/Users/a/MAI/DID-research/FIN/presentation/assets/logos/claude.png">    </p:cNvPr>
+          <p:cNvPr id="25" name="lane-1-chip-3" descr="/Users/a/MAI/DID/presentation/assets/logos/claude.png">    </p:cNvPr>
           <p:cNvPicPr>
             <a:picLocks noChangeAspect="1"/>
           </p:cNvPicPr>
@@ -3531,7 +3531,7 @@
       </p:sp>
       <p:pic>
         <p:nvPicPr>
-          <p:cNvPr id="29" name="lane-1-chip-6" descr="/Users/a/MAI/DID-research/FIN/presentation/assets/logos/claude.png">    </p:cNvPr>
+          <p:cNvPr id="29" name="lane-1-chip-6" descr="/Users/a/MAI/DID/presentation/assets/logos/claude.png">    </p:cNvPr>
           <p:cNvPicPr>
             <a:picLocks noChangeAspect="1"/>
           </p:cNvPicPr>
@@ -3577,7 +3577,7 @@
       </p:sp>
       <p:pic>
         <p:nvPicPr>
-          <p:cNvPr id="31" name="lane-1-chip-7" descr="/Users/a/MAI/DID-research/FIN/presentation/assets/logos/openai.png">    </p:cNvPr>
+          <p:cNvPr id="31" name="lane-1-chip-7" descr="/Users/a/MAI/DID/presentation/assets/logos/openai.png">    </p:cNvPr>
           <p:cNvPicPr>
             <a:picLocks noChangeAspect="1"/>
           </p:cNvPicPr>
@@ -3623,7 +3623,7 @@
       </p:sp>
       <p:pic>
         <p:nvPicPr>
-          <p:cNvPr id="33" name="lane-1-chip-8" descr="/Users/a/MAI/DID-research/FIN/presentation/assets/logos/claude.png">    </p:cNvPr>
+          <p:cNvPr id="33" name="lane-1-chip-8" descr="/Users/a/MAI/DID/presentation/assets/logos/claude.png">    </p:cNvPr>
           <p:cNvPicPr>
             <a:picLocks noChangeAspect="1"/>
           </p:cNvPicPr>
@@ -3669,7 +3669,7 @@
       </p:sp>
       <p:pic>
         <p:nvPicPr>
-          <p:cNvPr id="35" name="lane-1-chip-9" descr="/Users/a/MAI/DID-research/FIN/presentation/assets/logos/openai.png">    </p:cNvPr>
+          <p:cNvPr id="35" name="lane-1-chip-9" descr="/Users/a/MAI/DID/presentation/assets/logos/openai.png">    </p:cNvPr>
           <p:cNvPicPr>
             <a:picLocks noChangeAspect="1"/>
           </p:cNvPicPr>
@@ -3850,7 +3850,7 @@
       </p:sp>
       <p:pic>
         <p:nvPicPr>
-          <p:cNvPr id="41" name="lane-2-chip-1" descr="/Users/a/MAI/DID-research/FIN/presentation/assets/logos/gemini.png">    </p:cNvPr>
+          <p:cNvPr id="41" name="lane-2-chip-1" descr="/Users/a/MAI/DID/presentation/assets/logos/gemini.png">    </p:cNvPr>
           <p:cNvPicPr>
             <a:picLocks noChangeAspect="1"/>
           </p:cNvPicPr>
@@ -3896,7 +3896,7 @@
       </p:sp>
       <p:pic>
         <p:nvPicPr>
-          <p:cNvPr id="43" name="lane-2-chip-2" descr="/Users/a/MAI/DID-research/FIN/presentation/assets/logos/claude.png">    </p:cNvPr>
+          <p:cNvPr id="43" name="lane-2-chip-2" descr="/Users/a/MAI/DID/presentation/assets/logos/claude.png">    </p:cNvPr>
           <p:cNvPicPr>
             <a:picLocks noChangeAspect="1"/>
           </p:cNvPicPr>
@@ -3942,7 +3942,7 @@
       </p:sp>
       <p:pic>
         <p:nvPicPr>
-          <p:cNvPr id="45" name="lane-2-chip-3" descr="/Users/a/MAI/DID-research/FIN/presentation/assets/logos/openai.png">    </p:cNvPr>
+          <p:cNvPr id="45" name="lane-2-chip-3" descr="/Users/a/MAI/DID/presentation/assets/logos/openai.png">    </p:cNvPr>
           <p:cNvPicPr>
             <a:picLocks noChangeAspect="1"/>
           </p:cNvPicPr>
@@ -3988,7 +3988,7 @@
       </p:sp>
       <p:pic>
         <p:nvPicPr>
-          <p:cNvPr id="47" name="lane-2-chip-4" descr="/Users/a/MAI/DID-research/FIN/presentation/assets/logos/claude.png">    </p:cNvPr>
+          <p:cNvPr id="47" name="lane-2-chip-4" descr="/Users/a/MAI/DID/presentation/assets/logos/claude.png">    </p:cNvPr>
           <p:cNvPicPr>
             <a:picLocks noChangeAspect="1"/>
           </p:cNvPicPr>
@@ -4110,7 +4110,7 @@
       </p:sp>
       <p:pic>
         <p:nvPicPr>
-          <p:cNvPr id="51" name="lane-2-chip-7" descr="/Users/a/MAI/DID-research/FIN/presentation/assets/logos/claude.png">    </p:cNvPr>
+          <p:cNvPr id="51" name="lane-2-chip-7" descr="/Users/a/MAI/DID/presentation/assets/logos/claude.png">    </p:cNvPr>
           <p:cNvPicPr>
             <a:picLocks noChangeAspect="1"/>
           </p:cNvPicPr>
@@ -4156,7 +4156,7 @@
       </p:sp>
       <p:pic>
         <p:nvPicPr>
-          <p:cNvPr id="53" name="lane-2-chip-8" descr="/Users/a/MAI/DID-research/FIN/presentation/assets/logos/openai.png">    </p:cNvPr>
+          <p:cNvPr id="53" name="lane-2-chip-8" descr="/Users/a/MAI/DID/presentation/assets/logos/openai.png">    </p:cNvPr>
           <p:cNvPicPr>
             <a:picLocks noChangeAspect="1"/>
           </p:cNvPicPr>
@@ -4202,7 +4202,7 @@
       </p:sp>
       <p:pic>
         <p:nvPicPr>
-          <p:cNvPr id="55" name="lane-2-chip-9" descr="/Users/a/MAI/DID-research/FIN/presentation/assets/logos/claude.png">    </p:cNvPr>
+          <p:cNvPr id="55" name="lane-2-chip-9" descr="/Users/a/MAI/DID/presentation/assets/logos/claude.png">    </p:cNvPr>
           <p:cNvPicPr>
             <a:picLocks noChangeAspect="1"/>
           </p:cNvPicPr>
@@ -4383,7 +4383,7 @@
       </p:sp>
       <p:pic>
         <p:nvPicPr>
-          <p:cNvPr id="61" name="lane-3-chip-1" descr="/Users/a/MAI/DID-research/FIN/presentation/assets/logos/gemini.png">    </p:cNvPr>
+          <p:cNvPr id="61" name="lane-3-chip-1" descr="/Users/a/MAI/DID/presentation/assets/logos/gemini.png">    </p:cNvPr>
           <p:cNvPicPr>
             <a:picLocks noChangeAspect="1"/>
           </p:cNvPicPr>
@@ -4429,7 +4429,7 @@
       </p:sp>
       <p:pic>
         <p:nvPicPr>
-          <p:cNvPr id="63" name="lane-3-chip-2" descr="/Users/a/MAI/DID-research/FIN/presentation/assets/logos/claude.png">    </p:cNvPr>
+          <p:cNvPr id="63" name="lane-3-chip-2" descr="/Users/a/MAI/DID/presentation/assets/logos/claude.png">    </p:cNvPr>
           <p:cNvPicPr>
             <a:picLocks noChangeAspect="1"/>
           </p:cNvPicPr>
@@ -4475,7 +4475,7 @@
       </p:sp>
       <p:pic>
         <p:nvPicPr>
-          <p:cNvPr id="65" name="lane-3-chip-3" descr="/Users/a/MAI/DID-research/FIN/presentation/assets/logos/claude.png">    </p:cNvPr>
+          <p:cNvPr id="65" name="lane-3-chip-3" descr="/Users/a/MAI/DID/presentation/assets/logos/claude.png">    </p:cNvPr>
           <p:cNvPicPr>
             <a:picLocks noChangeAspect="1"/>
           </p:cNvPicPr>
@@ -4656,7 +4656,7 @@
       </p:sp>
       <p:pic>
         <p:nvPicPr>
-          <p:cNvPr id="71" name="lane-4-chip-1" descr="/Users/a/MAI/DID-research/FIN/presentation/assets/logos/claude.png">    </p:cNvPr>
+          <p:cNvPr id="71" name="lane-4-chip-1" descr="/Users/a/MAI/DID/presentation/assets/logos/claude.png">    </p:cNvPr>
           <p:cNvPicPr>
             <a:picLocks noChangeAspect="1"/>
           </p:cNvPicPr>
@@ -4702,7 +4702,7 @@
       </p:sp>
       <p:pic>
         <p:nvPicPr>
-          <p:cNvPr id="73" name="lane-4-chip-2" descr="/Users/a/MAI/DID-research/FIN/presentation/assets/logos/openai.png">    </p:cNvPr>
+          <p:cNvPr id="73" name="lane-4-chip-2" descr="/Users/a/MAI/DID/presentation/assets/logos/openai.png">    </p:cNvPr>
           <p:cNvPicPr>
             <a:picLocks noChangeAspect="1"/>
           </p:cNvPicPr>
@@ -4748,7 +4748,7 @@
       </p:sp>
       <p:pic>
         <p:nvPicPr>
-          <p:cNvPr id="75" name="lane-4-chip-3" descr="/Users/a/MAI/DID-research/FIN/presentation/assets/logos/claude.png">    </p:cNvPr>
+          <p:cNvPr id="75" name="lane-4-chip-3" descr="/Users/a/MAI/DID/presentation/assets/logos/claude.png">    </p:cNvPr>
           <p:cNvPicPr>
             <a:picLocks noChangeAspect="1"/>
           </p:cNvPicPr>
@@ -4794,7 +4794,7 @@
       </p:sp>
       <p:pic>
         <p:nvPicPr>
-          <p:cNvPr id="77" name="lane-4-chip-4" descr="/Users/a/MAI/DID-research/FIN/presentation/assets/logos/openai.png">    </p:cNvPr>
+          <p:cNvPr id="77" name="lane-4-chip-4" descr="/Users/a/MAI/DID/presentation/assets/logos/openai.png">    </p:cNvPr>
           <p:cNvPicPr>
             <a:picLocks noChangeAspect="1"/>
           </p:cNvPicPr>
@@ -4840,7 +4840,7 @@
       </p:sp>
       <p:pic>
         <p:nvPicPr>
-          <p:cNvPr id="79" name="lane-4-chip-5" descr="/Users/a/MAI/DID-research/FIN/presentation/assets/logos/claude.png">    </p:cNvPr>
+          <p:cNvPr id="79" name="lane-4-chip-5" descr="/Users/a/MAI/DID/presentation/assets/logos/claude.png">    </p:cNvPr>
           <p:cNvPicPr>
             <a:picLocks noChangeAspect="1"/>
           </p:cNvPicPr>
@@ -4904,35 +4904,35 @@
       </p:sp>
       <p:sp>
         <p:nvSpPr>
-          <p:cNvPr id="81" name="lane-4-result"/>
-          <p:cNvSpPr txBox="1"/>
-          <p:nvPr/>
-        </p:nvSpPr>
-        <p:spPr>
-          <a:xfrm>
-            <a:off x="7635240" y="3543953"/>
-            <a:ext cx="4005072" cy="483326"/>
-          </a:xfrm>
-          <a:prstGeom prst="rect">
-            <a:avLst/>
-          </a:prstGeom>
-          <a:noFill/>
-          <a:ln/>
-        </p:spPr>
-        <p:txBody>
-          <a:bodyPr wrap="none" lIns="0" tIns="0" rIns="0" bIns="0" rtlCol="0" anchor="ctr"/>
-          <a:lstStyle/>
-          <a:p>
-            <a:pPr algn="l" indent="0" marL="0">
-              <a:buNone/>
-            </a:pPr>
-            <a:r>
-              <a:rPr lang="en-US" sz="1400" dirty="0">
-                <a:solidFill>
-                  <a:schemeClr val="tx2"/>
-                </a:solidFill>
-              </a:rPr>
-              <a:t>другой опыт на имитаторе: 30,3 → 72,3 (+42)</a:t>
+          <p:cNvPr id="81" name="lane-4-next"/>
+          <p:cNvSpPr txBox="1"/>
+          <p:nvPr/>
+        </p:nvSpPr>
+        <p:spPr>
+          <a:xfrm>
+            <a:off x="6327648" y="3543953"/>
+            <a:ext cx="256032" cy="483326"/>
+          </a:xfrm>
+          <a:prstGeom prst="rect">
+            <a:avLst/>
+          </a:prstGeom>
+          <a:noFill/>
+          <a:ln/>
+        </p:spPr>
+        <p:txBody>
+          <a:bodyPr wrap="square" lIns="0" tIns="0" rIns="0" bIns="0" rtlCol="0" anchor="ctr"/>
+          <a:lstStyle/>
+          <a:p>
+            <a:pPr algn="ctr" indent="0" marL="0">
+              <a:buNone/>
+            </a:pPr>
+            <a:r>
+              <a:rPr lang="en-US" sz="1400" b="1" dirty="0">
+                <a:solidFill>
+                  <a:schemeClr val="accent5"/>
+                </a:solidFill>
+              </a:rPr>
+              <a:t>→</a:t>
             </a:r>
             <a:endParaRPr lang="en-US" sz="1400" dirty="0"/>
           </a:p>
@@ -4940,72 +4940,13 @@
       </p:sp>
       <p:sp>
         <p:nvSpPr>
-          <p:cNvPr id="82" name="lane-5-rule"/>
+          <p:cNvPr id="82" name="lane-4-chip-8-tile"/>
           <p:cNvSpPr/>
           <p:nvPr/>
         </p:nvSpPr>
         <p:spPr>
           <a:xfrm>
-            <a:off x="548640" y="4027279"/>
-            <a:ext cx="11091672" cy="0"/>
-          </a:xfrm>
-          <a:prstGeom prst="line">
-            <a:avLst/>
-          </a:prstGeom>
-          <a:noFill/>
-          <a:ln w="12700">
-            <a:solidFill>
-              <a:schemeClr val="bg2"/>
-            </a:solidFill>
-            <a:prstDash val="solid"/>
-          </a:ln>
-        </p:spPr>
-      </p:sp>
-      <p:sp>
-        <p:nvSpPr>
-          <p:cNvPr id="83" name="lane-5-name"/>
-          <p:cNvSpPr txBox="1"/>
-          <p:nvPr/>
-        </p:nvSpPr>
-        <p:spPr>
-          <a:xfrm>
-            <a:off x="548640" y="4027279"/>
-            <a:ext cx="3931920" cy="483326"/>
-          </a:xfrm>
-          <a:prstGeom prst="rect">
-            <a:avLst/>
-          </a:prstGeom>
-          <a:noFill/>
-          <a:ln/>
-        </p:spPr>
-        <p:txBody>
-          <a:bodyPr wrap="none" lIns="0" tIns="0" rIns="0" bIns="0" rtlCol="0" anchor="ctr"/>
-          <a:lstStyle/>
-          <a:p>
-            <a:pPr algn="l" indent="0" marL="0">
-              <a:buNone/>
-            </a:pPr>
-            <a:r>
-              <a:rPr lang="en-US" sz="1600" b="1" dirty="0">
-                <a:solidFill>
-                  <a:schemeClr val="tx1"/>
-                </a:solidFill>
-              </a:rPr>
-              <a:t>J1. Jev — быстрый сторож миссии</a:t>
-            </a:r>
-            <a:endParaRPr lang="en-US" sz="1600" dirty="0"/>
-          </a:p>
-        </p:txBody>
-      </p:sp>
-      <p:sp>
-        <p:nvSpPr>
-          <p:cNvPr id="84" name="lane-5-chip-1-tile"/>
-          <p:cNvSpPr/>
-          <p:nvPr/>
-        </p:nvSpPr>
-        <p:spPr>
-          <a:xfrm>
-            <a:off x="4572000" y="4140926"/>
+            <a:off x="6620256" y="3657600"/>
             <a:ext cx="256032" cy="256032"/>
           </a:xfrm>
           <a:prstGeom prst="roundRect">
@@ -5021,7 +4962,7 @@
       </p:sp>
       <p:pic>
         <p:nvPicPr>
-          <p:cNvPr id="85" name="lane-5-chip-1" descr="/Users/a/MAI/DID-research/FIN/presentation/assets/logos/claude.png">    </p:cNvPr>
+          <p:cNvPr id="83" name="lane-4-chip-8" descr="/Users/a/MAI/DID/presentation/assets/logos/claude.png">    </p:cNvPr>
           <p:cNvPicPr>
             <a:picLocks noChangeAspect="1"/>
           </p:cNvPicPr>
@@ -5035,7 +4976,7 @@
         </p:blipFill>
         <p:spPr>
           <a:xfrm>
-            <a:off x="4613148" y="4182074"/>
+            <a:off x="6661404" y="3698748"/>
             <a:ext cx="173736" cy="173736"/>
           </a:xfrm>
           <a:prstGeom prst="rect">
@@ -5045,13 +4986,13 @@
       </p:pic>
       <p:sp>
         <p:nvSpPr>
-          <p:cNvPr id="86" name="lane-5-chip-2-tile"/>
+          <p:cNvPr id="84" name="lane-4-chip-9-tile"/>
           <p:cNvSpPr/>
           <p:nvPr/>
         </p:nvSpPr>
         <p:spPr>
           <a:xfrm>
-            <a:off x="4864608" y="4140926"/>
+            <a:off x="6912864" y="3657600"/>
             <a:ext cx="256032" cy="256032"/>
           </a:xfrm>
           <a:prstGeom prst="roundRect">
@@ -5067,7 +5008,7 @@
       </p:sp>
       <p:pic>
         <p:nvPicPr>
-          <p:cNvPr id="87" name="lane-5-chip-2" descr="/Users/a/MAI/DID-research/FIN/presentation/assets/logos/openai.png">    </p:cNvPr>
+          <p:cNvPr id="85" name="lane-4-chip-9" descr="/Users/a/MAI/DID/presentation/assets/logos/openai.png">    </p:cNvPr>
           <p:cNvPicPr>
             <a:picLocks noChangeAspect="1"/>
           </p:cNvPicPr>
@@ -5081,7 +5022,7 @@
         </p:blipFill>
         <p:spPr>
           <a:xfrm>
-            <a:off x="4905756" y="4182074"/>
+            <a:off x="6954012" y="3698748"/>
             <a:ext cx="173736" cy="173736"/>
           </a:xfrm>
           <a:prstGeom prst="rect">
@@ -5091,13 +5032,13 @@
       </p:pic>
       <p:sp>
         <p:nvSpPr>
-          <p:cNvPr id="88" name="lane-5-chip-3-tile"/>
-          <p:cNvSpPr/>
-          <p:nvPr/>
-        </p:nvSpPr>
-        <p:spPr>
-          <a:xfrm>
-            <a:off x="5157216" y="4140926"/>
+          <p:cNvPr id="86" name="lane-4-chip-10"/>
+          <p:cNvSpPr txBox="1"/>
+          <p:nvPr/>
+        </p:nvSpPr>
+        <p:spPr>
+          <a:xfrm>
+            <a:off x="7205472" y="3657600"/>
             <a:ext cx="256032" cy="256032"/>
           </a:xfrm>
           <a:prstGeom prst="roundRect">
@@ -5106,6 +5047,141 @@
             </a:avLst>
           </a:prstGeom>
           <a:solidFill>
+            <a:schemeClr val="accent3"/>
+          </a:solidFill>
+          <a:ln/>
+        </p:spPr>
+        <p:txBody>
+          <a:bodyPr wrap="square" lIns="0" tIns="0" rIns="0" bIns="0" rtlCol="0" anchor="ctr"/>
+          <a:lstStyle/>
+          <a:p>
+            <a:pPr algn="ctr" indent="0" marL="0">
+              <a:buNone/>
+            </a:pPr>
+            <a:r>
+              <a:rPr lang="en-US" sz="1300" b="1" dirty="0">
+                <a:solidFill>
+                  <a:schemeClr val="bg1"/>
+                </a:solidFill>
+              </a:rPr>
+              <a:t>✓</a:t>
+            </a:r>
+            <a:endParaRPr lang="en-US" sz="1300" dirty="0"/>
+          </a:p>
+        </p:txBody>
+      </p:sp>
+      <p:sp>
+        <p:nvSpPr>
+          <p:cNvPr id="87" name="lane-4-result"/>
+          <p:cNvSpPr txBox="1"/>
+          <p:nvPr/>
+        </p:nvSpPr>
+        <p:spPr>
+          <a:xfrm>
+            <a:off x="7635240" y="3543953"/>
+            <a:ext cx="4005072" cy="483326"/>
+          </a:xfrm>
+          <a:prstGeom prst="rect">
+            <a:avLst/>
+          </a:prstGeom>
+          <a:noFill/>
+          <a:ln/>
+        </p:spPr>
+        <p:txBody>
+          <a:bodyPr wrap="none" lIns="0" tIns="0" rIns="0" bIns="0" rtlCol="0" anchor="ctr"/>
+          <a:lstStyle/>
+          <a:p>
+            <a:pPr algn="l" indent="0" marL="0">
+              <a:buNone/>
+            </a:pPr>
+            <a:r>
+              <a:rPr lang="en-US" sz="1400" dirty="0">
+                <a:solidFill>
+                  <a:schemeClr val="tx2"/>
+                </a:solidFill>
+              </a:rPr>
+              <a:t>на настоящей модели: 34,7 → 73,2 очка</a:t>
+            </a:r>
+            <a:endParaRPr lang="en-US" sz="1400" dirty="0"/>
+          </a:p>
+        </p:txBody>
+      </p:sp>
+      <p:sp>
+        <p:nvSpPr>
+          <p:cNvPr id="88" name="lane-5-rule"/>
+          <p:cNvSpPr/>
+          <p:nvPr/>
+        </p:nvSpPr>
+        <p:spPr>
+          <a:xfrm>
+            <a:off x="548640" y="4027279"/>
+            <a:ext cx="11091672" cy="0"/>
+          </a:xfrm>
+          <a:prstGeom prst="line">
+            <a:avLst/>
+          </a:prstGeom>
+          <a:noFill/>
+          <a:ln w="12700">
+            <a:solidFill>
+              <a:schemeClr val="bg2"/>
+            </a:solidFill>
+            <a:prstDash val="solid"/>
+          </a:ln>
+        </p:spPr>
+      </p:sp>
+      <p:sp>
+        <p:nvSpPr>
+          <p:cNvPr id="89" name="lane-5-name"/>
+          <p:cNvSpPr txBox="1"/>
+          <p:nvPr/>
+        </p:nvSpPr>
+        <p:spPr>
+          <a:xfrm>
+            <a:off x="548640" y="4027279"/>
+            <a:ext cx="3931920" cy="483326"/>
+          </a:xfrm>
+          <a:prstGeom prst="rect">
+            <a:avLst/>
+          </a:prstGeom>
+          <a:noFill/>
+          <a:ln/>
+        </p:spPr>
+        <p:txBody>
+          <a:bodyPr wrap="none" lIns="0" tIns="0" rIns="0" bIns="0" rtlCol="0" anchor="ctr"/>
+          <a:lstStyle/>
+          <a:p>
+            <a:pPr algn="l" indent="0" marL="0">
+              <a:buNone/>
+            </a:pPr>
+            <a:r>
+              <a:rPr lang="en-US" sz="1600" b="1" dirty="0">
+                <a:solidFill>
+                  <a:schemeClr val="tx1"/>
+                </a:solidFill>
+              </a:rPr>
+              <a:t>J1. Jev — быстрый сторож миссии</a:t>
+            </a:r>
+            <a:endParaRPr lang="en-US" sz="1600" dirty="0"/>
+          </a:p>
+        </p:txBody>
+      </p:sp>
+      <p:sp>
+        <p:nvSpPr>
+          <p:cNvPr id="90" name="lane-5-chip-1-tile"/>
+          <p:cNvSpPr/>
+          <p:nvPr/>
+        </p:nvSpPr>
+        <p:spPr>
+          <a:xfrm>
+            <a:off x="4572000" y="4140926"/>
+            <a:ext cx="256032" cy="256032"/>
+          </a:xfrm>
+          <a:prstGeom prst="roundRect">
+            <a:avLst>
+              <a:gd name="adj" fmla="val 14286"/>
+            </a:avLst>
+          </a:prstGeom>
+          <a:solidFill>
             <a:schemeClr val="bg2"/>
           </a:solidFill>
           <a:ln/>
@@ -5113,7 +5189,7 @@
       </p:sp>
       <p:pic>
         <p:nvPicPr>
-          <p:cNvPr id="89" name="lane-5-chip-3" descr="/Users/a/MAI/DID-research/FIN/presentation/assets/logos/claude.png">    </p:cNvPr>
+          <p:cNvPr id="91" name="lane-5-chip-1" descr="/Users/a/MAI/DID/presentation/assets/logos/claude.png">    </p:cNvPr>
           <p:cNvPicPr>
             <a:picLocks noChangeAspect="1"/>
           </p:cNvPicPr>
@@ -5127,7 +5203,7 @@
         </p:blipFill>
         <p:spPr>
           <a:xfrm>
-            <a:off x="5198364" y="4182074"/>
+            <a:off x="4613148" y="4182074"/>
             <a:ext cx="173736" cy="173736"/>
           </a:xfrm>
           <a:prstGeom prst="rect">
@@ -5137,13 +5213,13 @@
       </p:pic>
       <p:sp>
         <p:nvSpPr>
-          <p:cNvPr id="90" name="lane-5-chip-4-tile"/>
+          <p:cNvPr id="92" name="lane-5-chip-2-tile"/>
           <p:cNvSpPr/>
           <p:nvPr/>
         </p:nvSpPr>
         <p:spPr>
           <a:xfrm>
-            <a:off x="5449824" y="4140926"/>
+            <a:off x="4864608" y="4140926"/>
             <a:ext cx="256032" cy="256032"/>
           </a:xfrm>
           <a:prstGeom prst="roundRect">
@@ -5159,7 +5235,7 @@
       </p:sp>
       <p:pic>
         <p:nvPicPr>
-          <p:cNvPr id="91" name="lane-5-chip-4" descr="/Users/a/MAI/DID-research/FIN/presentation/assets/logos/claude.png">    </p:cNvPr>
+          <p:cNvPr id="93" name="lane-5-chip-2" descr="/Users/a/MAI/DID/presentation/assets/logos/openai.png">    </p:cNvPr>
           <p:cNvPicPr>
             <a:picLocks noChangeAspect="1"/>
           </p:cNvPicPr>
@@ -5173,7 +5249,7 @@
         </p:blipFill>
         <p:spPr>
           <a:xfrm>
-            <a:off x="5490972" y="4182074"/>
+            <a:off x="4905756" y="4182074"/>
             <a:ext cx="173736" cy="173736"/>
           </a:xfrm>
           <a:prstGeom prst="rect">
@@ -5183,13 +5259,13 @@
       </p:pic>
       <p:sp>
         <p:nvSpPr>
-          <p:cNvPr id="92" name="lane-5-chip-5-tile"/>
+          <p:cNvPr id="94" name="lane-5-chip-3-tile"/>
           <p:cNvSpPr/>
           <p:nvPr/>
         </p:nvSpPr>
         <p:spPr>
           <a:xfrm>
-            <a:off x="5742432" y="4140926"/>
+            <a:off x="5157216" y="4140926"/>
             <a:ext cx="256032" cy="256032"/>
           </a:xfrm>
           <a:prstGeom prst="roundRect">
@@ -5205,7 +5281,7 @@
       </p:sp>
       <p:pic>
         <p:nvPicPr>
-          <p:cNvPr id="93" name="lane-5-chip-5" descr="/Users/a/MAI/DID-research/FIN/presentation/assets/logos/openai.png">    </p:cNvPr>
+          <p:cNvPr id="95" name="lane-5-chip-3" descr="/Users/a/MAI/DID/presentation/assets/logos/claude.png">    </p:cNvPr>
           <p:cNvPicPr>
             <a:picLocks noChangeAspect="1"/>
           </p:cNvPicPr>
@@ -5219,7 +5295,7 @@
         </p:blipFill>
         <p:spPr>
           <a:xfrm>
-            <a:off x="5783580" y="4182074"/>
+            <a:off x="5198364" y="4182074"/>
             <a:ext cx="173736" cy="173736"/>
           </a:xfrm>
           <a:prstGeom prst="rect">
@@ -5229,13 +5305,13 @@
       </p:pic>
       <p:sp>
         <p:nvSpPr>
-          <p:cNvPr id="94" name="lane-5-chip-6"/>
-          <p:cNvSpPr txBox="1"/>
-          <p:nvPr/>
-        </p:nvSpPr>
-        <p:spPr>
-          <a:xfrm>
-            <a:off x="6035040" y="4140926"/>
+          <p:cNvPr id="96" name="lane-5-chip-4-tile"/>
+          <p:cNvSpPr/>
+          <p:nvPr/>
+        </p:nvSpPr>
+        <p:spPr>
+          <a:xfrm>
+            <a:off x="5449824" y="4140926"/>
             <a:ext cx="256032" cy="256032"/>
           </a:xfrm>
           <a:prstGeom prst="roundRect">
@@ -5244,141 +5320,6 @@
             </a:avLst>
           </a:prstGeom>
           <a:solidFill>
-            <a:schemeClr val="accent3"/>
-          </a:solidFill>
-          <a:ln/>
-        </p:spPr>
-        <p:txBody>
-          <a:bodyPr wrap="square" lIns="0" tIns="0" rIns="0" bIns="0" rtlCol="0" anchor="ctr"/>
-          <a:lstStyle/>
-          <a:p>
-            <a:pPr algn="ctr" indent="0" marL="0">
-              <a:buNone/>
-            </a:pPr>
-            <a:r>
-              <a:rPr lang="en-US" sz="1300" b="1" dirty="0">
-                <a:solidFill>
-                  <a:schemeClr val="bg1"/>
-                </a:solidFill>
-              </a:rPr>
-              <a:t>✓</a:t>
-            </a:r>
-            <a:endParaRPr lang="en-US" sz="1300" dirty="0"/>
-          </a:p>
-        </p:txBody>
-      </p:sp>
-      <p:sp>
-        <p:nvSpPr>
-          <p:cNvPr id="95" name="lane-5-result"/>
-          <p:cNvSpPr txBox="1"/>
-          <p:nvPr/>
-        </p:nvSpPr>
-        <p:spPr>
-          <a:xfrm>
-            <a:off x="7635240" y="4027279"/>
-            <a:ext cx="4005072" cy="483326"/>
-          </a:xfrm>
-          <a:prstGeom prst="rect">
-            <a:avLst/>
-          </a:prstGeom>
-          <a:noFill/>
-          <a:ln/>
-        </p:spPr>
-        <p:txBody>
-          <a:bodyPr wrap="none" lIns="0" tIns="0" rIns="0" bIns="0" rtlCol="0" anchor="ctr"/>
-          <a:lstStyle/>
-          <a:p>
-            <a:pPr algn="l" indent="0" marL="0">
-              <a:buNone/>
-            </a:pPr>
-            <a:r>
-              <a:rPr lang="en-US" sz="1400" dirty="0">
-                <a:solidFill>
-                  <a:schemeClr val="tx2"/>
-                </a:solidFill>
-              </a:rPr>
-              <a:t>ответ 0,4 с; ревью защиты денег и ключа</a:t>
-            </a:r>
-            <a:endParaRPr lang="en-US" sz="1400" dirty="0"/>
-          </a:p>
-        </p:txBody>
-      </p:sp>
-      <p:sp>
-        <p:nvSpPr>
-          <p:cNvPr id="96" name="lane-6-rule"/>
-          <p:cNvSpPr/>
-          <p:nvPr/>
-        </p:nvSpPr>
-        <p:spPr>
-          <a:xfrm>
-            <a:off x="548640" y="4510605"/>
-            <a:ext cx="11091672" cy="0"/>
-          </a:xfrm>
-          <a:prstGeom prst="line">
-            <a:avLst/>
-          </a:prstGeom>
-          <a:noFill/>
-          <a:ln w="12700">
-            <a:solidFill>
-              <a:schemeClr val="bg2"/>
-            </a:solidFill>
-            <a:prstDash val="solid"/>
-          </a:ln>
-        </p:spPr>
-      </p:sp>
-      <p:sp>
-        <p:nvSpPr>
-          <p:cNvPr id="97" name="lane-6-name"/>
-          <p:cNvSpPr txBox="1"/>
-          <p:nvPr/>
-        </p:nvSpPr>
-        <p:spPr>
-          <a:xfrm>
-            <a:off x="548640" y="4510605"/>
-            <a:ext cx="3931920" cy="483326"/>
-          </a:xfrm>
-          <a:prstGeom prst="rect">
-            <a:avLst/>
-          </a:prstGeom>
-          <a:noFill/>
-          <a:ln/>
-        </p:spPr>
-        <p:txBody>
-          <a:bodyPr wrap="none" lIns="0" tIns="0" rIns="0" bIns="0" rtlCol="0" anchor="ctr"/>
-          <a:lstStyle/>
-          <a:p>
-            <a:pPr algn="l" indent="0" marL="0">
-              <a:buNone/>
-            </a:pPr>
-            <a:r>
-              <a:rPr lang="en-US" sz="1600" b="1" dirty="0">
-                <a:solidFill>
-                  <a:schemeClr val="tx1"/>
-                </a:solidFill>
-              </a:rPr>
-              <a:t>M1. Два робота с координацией</a:t>
-            </a:r>
-            <a:endParaRPr lang="en-US" sz="1600" dirty="0"/>
-          </a:p>
-        </p:txBody>
-      </p:sp>
-      <p:sp>
-        <p:nvSpPr>
-          <p:cNvPr id="98" name="lane-6-chip-1-tile"/>
-          <p:cNvSpPr/>
-          <p:nvPr/>
-        </p:nvSpPr>
-        <p:spPr>
-          <a:xfrm>
-            <a:off x="4572000" y="4624251"/>
-            <a:ext cx="256032" cy="256032"/>
-          </a:xfrm>
-          <a:prstGeom prst="roundRect">
-            <a:avLst>
-              <a:gd name="adj" fmla="val 14286"/>
-            </a:avLst>
-          </a:prstGeom>
-          <a:solidFill>
             <a:schemeClr val="bg2"/>
           </a:solidFill>
           <a:ln/>
@@ -5386,7 +5327,7 @@
       </p:sp>
       <p:pic>
         <p:nvPicPr>
-          <p:cNvPr id="99" name="lane-6-chip-1" descr="/Users/a/MAI/DID-research/FIN/presentation/assets/logos/claude.png">    </p:cNvPr>
+          <p:cNvPr id="97" name="lane-5-chip-4" descr="/Users/a/MAI/DID/presentation/assets/logos/claude.png">    </p:cNvPr>
           <p:cNvPicPr>
             <a:picLocks noChangeAspect="1"/>
           </p:cNvPicPr>
@@ -5400,7 +5341,7 @@
         </p:blipFill>
         <p:spPr>
           <a:xfrm>
-            <a:off x="4613148" y="4665399"/>
+            <a:off x="5490972" y="4182074"/>
             <a:ext cx="173736" cy="173736"/>
           </a:xfrm>
           <a:prstGeom prst="rect">
@@ -5410,13 +5351,13 @@
       </p:pic>
       <p:sp>
         <p:nvSpPr>
-          <p:cNvPr id="100" name="lane-6-chip-2-tile"/>
+          <p:cNvPr id="98" name="lane-5-chip-5-tile"/>
           <p:cNvSpPr/>
           <p:nvPr/>
         </p:nvSpPr>
         <p:spPr>
           <a:xfrm>
-            <a:off x="4864608" y="4624251"/>
+            <a:off x="5742432" y="4140926"/>
             <a:ext cx="256032" cy="256032"/>
           </a:xfrm>
           <a:prstGeom prst="roundRect">
@@ -5432,7 +5373,7 @@
       </p:sp>
       <p:pic>
         <p:nvPicPr>
-          <p:cNvPr id="101" name="lane-6-chip-2" descr="/Users/a/MAI/DID-research/FIN/presentation/assets/logos/openai.png">    </p:cNvPr>
+          <p:cNvPr id="99" name="lane-5-chip-5" descr="/Users/a/MAI/DID/presentation/assets/logos/openai.png">    </p:cNvPr>
           <p:cNvPicPr>
             <a:picLocks noChangeAspect="1"/>
           </p:cNvPicPr>
@@ -5446,7 +5387,7 @@
         </p:blipFill>
         <p:spPr>
           <a:xfrm>
-            <a:off x="4905756" y="4665399"/>
+            <a:off x="5783580" y="4182074"/>
             <a:ext cx="173736" cy="173736"/>
           </a:xfrm>
           <a:prstGeom prst="rect">
@@ -5456,13 +5397,13 @@
       </p:pic>
       <p:sp>
         <p:nvSpPr>
-          <p:cNvPr id="102" name="lane-6-chip-3-tile"/>
-          <p:cNvSpPr/>
-          <p:nvPr/>
-        </p:nvSpPr>
-        <p:spPr>
-          <a:xfrm>
-            <a:off x="5157216" y="4624251"/>
+          <p:cNvPr id="100" name="lane-5-chip-6"/>
+          <p:cNvSpPr txBox="1"/>
+          <p:nvPr/>
+        </p:nvSpPr>
+        <p:spPr>
+          <a:xfrm>
+            <a:off x="6035040" y="4140926"/>
             <a:ext cx="256032" cy="256032"/>
           </a:xfrm>
           <a:prstGeom prst="roundRect">
@@ -5471,6 +5412,141 @@
             </a:avLst>
           </a:prstGeom>
           <a:solidFill>
+            <a:schemeClr val="accent3"/>
+          </a:solidFill>
+          <a:ln/>
+        </p:spPr>
+        <p:txBody>
+          <a:bodyPr wrap="square" lIns="0" tIns="0" rIns="0" bIns="0" rtlCol="0" anchor="ctr"/>
+          <a:lstStyle/>
+          <a:p>
+            <a:pPr algn="ctr" indent="0" marL="0">
+              <a:buNone/>
+            </a:pPr>
+            <a:r>
+              <a:rPr lang="en-US" sz="1300" b="1" dirty="0">
+                <a:solidFill>
+                  <a:schemeClr val="bg1"/>
+                </a:solidFill>
+              </a:rPr>
+              <a:t>✓</a:t>
+            </a:r>
+            <a:endParaRPr lang="en-US" sz="1300" dirty="0"/>
+          </a:p>
+        </p:txBody>
+      </p:sp>
+      <p:sp>
+        <p:nvSpPr>
+          <p:cNvPr id="101" name="lane-5-result"/>
+          <p:cNvSpPr txBox="1"/>
+          <p:nvPr/>
+        </p:nvSpPr>
+        <p:spPr>
+          <a:xfrm>
+            <a:off x="7635240" y="4027279"/>
+            <a:ext cx="4005072" cy="483326"/>
+          </a:xfrm>
+          <a:prstGeom prst="rect">
+            <a:avLst/>
+          </a:prstGeom>
+          <a:noFill/>
+          <a:ln/>
+        </p:spPr>
+        <p:txBody>
+          <a:bodyPr wrap="none" lIns="0" tIns="0" rIns="0" bIns="0" rtlCol="0" anchor="ctr"/>
+          <a:lstStyle/>
+          <a:p>
+            <a:pPr algn="l" indent="0" marL="0">
+              <a:buNone/>
+            </a:pPr>
+            <a:r>
+              <a:rPr lang="en-US" sz="1400" dirty="0">
+                <a:solidFill>
+                  <a:schemeClr val="tx2"/>
+                </a:solidFill>
+              </a:rPr>
+              <a:t>ответ 0,4 с; ревью защиты денег и ключа</a:t>
+            </a:r>
+            <a:endParaRPr lang="en-US" sz="1400" dirty="0"/>
+          </a:p>
+        </p:txBody>
+      </p:sp>
+      <p:sp>
+        <p:nvSpPr>
+          <p:cNvPr id="102" name="lane-6-rule"/>
+          <p:cNvSpPr/>
+          <p:nvPr/>
+        </p:nvSpPr>
+        <p:spPr>
+          <a:xfrm>
+            <a:off x="548640" y="4510605"/>
+            <a:ext cx="11091672" cy="0"/>
+          </a:xfrm>
+          <a:prstGeom prst="line">
+            <a:avLst/>
+          </a:prstGeom>
+          <a:noFill/>
+          <a:ln w="12700">
+            <a:solidFill>
+              <a:schemeClr val="bg2"/>
+            </a:solidFill>
+            <a:prstDash val="solid"/>
+          </a:ln>
+        </p:spPr>
+      </p:sp>
+      <p:sp>
+        <p:nvSpPr>
+          <p:cNvPr id="103" name="lane-6-name"/>
+          <p:cNvSpPr txBox="1"/>
+          <p:nvPr/>
+        </p:nvSpPr>
+        <p:spPr>
+          <a:xfrm>
+            <a:off x="548640" y="4510605"/>
+            <a:ext cx="3931920" cy="483326"/>
+          </a:xfrm>
+          <a:prstGeom prst="rect">
+            <a:avLst/>
+          </a:prstGeom>
+          <a:noFill/>
+          <a:ln/>
+        </p:spPr>
+        <p:txBody>
+          <a:bodyPr wrap="none" lIns="0" tIns="0" rIns="0" bIns="0" rtlCol="0" anchor="ctr"/>
+          <a:lstStyle/>
+          <a:p>
+            <a:pPr algn="l" indent="0" marL="0">
+              <a:buNone/>
+            </a:pPr>
+            <a:r>
+              <a:rPr lang="en-US" sz="1600" b="1" dirty="0">
+                <a:solidFill>
+                  <a:schemeClr val="tx1"/>
+                </a:solidFill>
+              </a:rPr>
+              <a:t>M1. Два робота с координацией</a:t>
+            </a:r>
+            <a:endParaRPr lang="en-US" sz="1600" dirty="0"/>
+          </a:p>
+        </p:txBody>
+      </p:sp>
+      <p:sp>
+        <p:nvSpPr>
+          <p:cNvPr id="104" name="lane-6-chip-1-tile"/>
+          <p:cNvSpPr/>
+          <p:nvPr/>
+        </p:nvSpPr>
+        <p:spPr>
+          <a:xfrm>
+            <a:off x="4572000" y="4624251"/>
+            <a:ext cx="256032" cy="256032"/>
+          </a:xfrm>
+          <a:prstGeom prst="roundRect">
+            <a:avLst>
+              <a:gd name="adj" fmla="val 14286"/>
+            </a:avLst>
+          </a:prstGeom>
+          <a:solidFill>
             <a:schemeClr val="bg2"/>
           </a:solidFill>
           <a:ln/>
@@ -5478,7 +5554,7 @@
       </p:sp>
       <p:pic>
         <p:nvPicPr>
-          <p:cNvPr id="103" name="lane-6-chip-3" descr="/Users/a/MAI/DID-research/FIN/presentation/assets/logos/claude.png">    </p:cNvPr>
+          <p:cNvPr id="105" name="lane-6-chip-1" descr="/Users/a/MAI/DID/presentation/assets/logos/claude.png">    </p:cNvPr>
           <p:cNvPicPr>
             <a:picLocks noChangeAspect="1"/>
           </p:cNvPicPr>
@@ -5492,7 +5568,7 @@
         </p:blipFill>
         <p:spPr>
           <a:xfrm>
-            <a:off x="5198364" y="4665399"/>
+            <a:off x="4613148" y="4665399"/>
             <a:ext cx="173736" cy="173736"/>
           </a:xfrm>
           <a:prstGeom prst="rect">
@@ -5502,13 +5578,13 @@
       </p:pic>
       <p:sp>
         <p:nvSpPr>
-          <p:cNvPr id="104" name="lane-6-chip-4-tile"/>
+          <p:cNvPr id="106" name="lane-6-chip-2-tile"/>
           <p:cNvSpPr/>
           <p:nvPr/>
         </p:nvSpPr>
         <p:spPr>
           <a:xfrm>
-            <a:off x="5449824" y="4624251"/>
+            <a:off x="4864608" y="4624251"/>
             <a:ext cx="256032" cy="256032"/>
           </a:xfrm>
           <a:prstGeom prst="roundRect">
@@ -5524,7 +5600,7 @@
       </p:sp>
       <p:pic>
         <p:nvPicPr>
-          <p:cNvPr id="105" name="lane-6-chip-4" descr="/Users/a/MAI/DID-research/FIN/presentation/assets/logos/openai.png">    </p:cNvPr>
+          <p:cNvPr id="107" name="lane-6-chip-2" descr="/Users/a/MAI/DID/presentation/assets/logos/openai.png">    </p:cNvPr>
           <p:cNvPicPr>
             <a:picLocks noChangeAspect="1"/>
           </p:cNvPicPr>
@@ -5538,7 +5614,7 @@
         </p:blipFill>
         <p:spPr>
           <a:xfrm>
-            <a:off x="5490972" y="4665399"/>
+            <a:off x="4905756" y="4665399"/>
             <a:ext cx="173736" cy="173736"/>
           </a:xfrm>
           <a:prstGeom prst="rect">
@@ -5548,13 +5624,13 @@
       </p:pic>
       <p:sp>
         <p:nvSpPr>
-          <p:cNvPr id="106" name="lane-6-chip-5-tile"/>
+          <p:cNvPr id="108" name="lane-6-chip-3-tile"/>
           <p:cNvSpPr/>
           <p:nvPr/>
         </p:nvSpPr>
         <p:spPr>
           <a:xfrm>
-            <a:off x="5742432" y="4624251"/>
+            <a:off x="5157216" y="4624251"/>
             <a:ext cx="256032" cy="256032"/>
           </a:xfrm>
           <a:prstGeom prst="roundRect">
@@ -5570,7 +5646,7 @@
       </p:sp>
       <p:pic>
         <p:nvPicPr>
-          <p:cNvPr id="107" name="lane-6-chip-5" descr="/Users/a/MAI/DID-research/FIN/presentation/assets/logos/claude.png">    </p:cNvPr>
+          <p:cNvPr id="109" name="lane-6-chip-3" descr="/Users/a/MAI/DID/presentation/assets/logos/claude.png">    </p:cNvPr>
           <p:cNvPicPr>
             <a:picLocks noChangeAspect="1"/>
           </p:cNvPicPr>
@@ -5584,7 +5660,7 @@
         </p:blipFill>
         <p:spPr>
           <a:xfrm>
-            <a:off x="5783580" y="4665399"/>
+            <a:off x="5198364" y="4665399"/>
             <a:ext cx="173736" cy="173736"/>
           </a:xfrm>
           <a:prstGeom prst="rect">
@@ -5594,13 +5670,13 @@
       </p:pic>
       <p:sp>
         <p:nvSpPr>
-          <p:cNvPr id="108" name="lane-6-chip-6"/>
-          <p:cNvSpPr txBox="1"/>
-          <p:nvPr/>
-        </p:nvSpPr>
-        <p:spPr>
-          <a:xfrm>
-            <a:off x="6035040" y="4624251"/>
+          <p:cNvPr id="110" name="lane-6-chip-4-tile"/>
+          <p:cNvSpPr/>
+          <p:nvPr/>
+        </p:nvSpPr>
+        <p:spPr>
+          <a:xfrm>
+            <a:off x="5449824" y="4624251"/>
             <a:ext cx="256032" cy="256032"/>
           </a:xfrm>
           <a:prstGeom prst="roundRect">
@@ -5609,141 +5685,6 @@
             </a:avLst>
           </a:prstGeom>
           <a:solidFill>
-            <a:schemeClr val="accent3"/>
-          </a:solidFill>
-          <a:ln/>
-        </p:spPr>
-        <p:txBody>
-          <a:bodyPr wrap="square" lIns="0" tIns="0" rIns="0" bIns="0" rtlCol="0" anchor="ctr"/>
-          <a:lstStyle/>
-          <a:p>
-            <a:pPr algn="ctr" indent="0" marL="0">
-              <a:buNone/>
-            </a:pPr>
-            <a:r>
-              <a:rPr lang="en-US" sz="1300" b="1" dirty="0">
-                <a:solidFill>
-                  <a:schemeClr val="bg1"/>
-                </a:solidFill>
-              </a:rPr>
-              <a:t>✓</a:t>
-            </a:r>
-            <a:endParaRPr lang="en-US" sz="1300" dirty="0"/>
-          </a:p>
-        </p:txBody>
-      </p:sp>
-      <p:sp>
-        <p:nvSpPr>
-          <p:cNvPr id="109" name="lane-6-result"/>
-          <p:cNvSpPr txBox="1"/>
-          <p:nvPr/>
-        </p:nvSpPr>
-        <p:spPr>
-          <a:xfrm>
-            <a:off x="7635240" y="4510605"/>
-            <a:ext cx="4005072" cy="483326"/>
-          </a:xfrm>
-          <a:prstGeom prst="rect">
-            <a:avLst/>
-          </a:prstGeom>
-          <a:noFill/>
-          <a:ln/>
-        </p:spPr>
-        <p:txBody>
-          <a:bodyPr wrap="none" lIns="0" tIns="0" rIns="0" bIns="0" rtlCol="0" anchor="ctr"/>
-          <a:lstStyle/>
-          <a:p>
-            <a:pPr algn="l" indent="0" marL="0">
-              <a:buNone/>
-            </a:pPr>
-            <a:r>
-              <a:rPr lang="en-US" sz="1400" dirty="0">
-                <a:solidFill>
-                  <a:schemeClr val="tx2"/>
-                </a:solidFill>
-              </a:rPr>
-              <a:t>против пары без связи прогон короче на 26 с</a:t>
-            </a:r>
-            <a:endParaRPr lang="en-US" sz="1400" dirty="0"/>
-          </a:p>
-        </p:txBody>
-      </p:sp>
-      <p:sp>
-        <p:nvSpPr>
-          <p:cNvPr id="110" name="lane-7-rule"/>
-          <p:cNvSpPr/>
-          <p:nvPr/>
-        </p:nvSpPr>
-        <p:spPr>
-          <a:xfrm>
-            <a:off x="548640" y="4993930"/>
-            <a:ext cx="11091672" cy="0"/>
-          </a:xfrm>
-          <a:prstGeom prst="line">
-            <a:avLst/>
-          </a:prstGeom>
-          <a:noFill/>
-          <a:ln w="12700">
-            <a:solidFill>
-              <a:schemeClr val="bg2"/>
-            </a:solidFill>
-            <a:prstDash val="solid"/>
-          </a:ln>
-        </p:spPr>
-      </p:sp>
-      <p:sp>
-        <p:nvSpPr>
-          <p:cNvPr id="111" name="lane-7-name"/>
-          <p:cNvSpPr txBox="1"/>
-          <p:nvPr/>
-        </p:nvSpPr>
-        <p:spPr>
-          <a:xfrm>
-            <a:off x="548640" y="4993930"/>
-            <a:ext cx="3931920" cy="483326"/>
-          </a:xfrm>
-          <a:prstGeom prst="rect">
-            <a:avLst/>
-          </a:prstGeom>
-          <a:noFill/>
-          <a:ln/>
-        </p:spPr>
-        <p:txBody>
-          <a:bodyPr wrap="none" lIns="0" tIns="0" rIns="0" bIns="0" rtlCol="0" anchor="ctr"/>
-          <a:lstStyle/>
-          <a:p>
-            <a:pPr algn="l" indent="0" marL="0">
-              <a:buNone/>
-            </a:pPr>
-            <a:r>
-              <a:rPr lang="en-US" sz="1600" b="1" dirty="0">
-                <a:solidFill>
-                  <a:schemeClr val="tx1"/>
-                </a:solidFill>
-              </a:rPr>
-              <a:t>F2. SLAM вместо готовой карты</a:t>
-            </a:r>
-            <a:endParaRPr lang="en-US" sz="1600" dirty="0"/>
-          </a:p>
-        </p:txBody>
-      </p:sp>
-      <p:sp>
-        <p:nvSpPr>
-          <p:cNvPr id="112" name="lane-7-chip-1-tile"/>
-          <p:cNvSpPr/>
-          <p:nvPr/>
-        </p:nvSpPr>
-        <p:spPr>
-          <a:xfrm>
-            <a:off x="4572000" y="5107577"/>
-            <a:ext cx="256032" cy="256032"/>
-          </a:xfrm>
-          <a:prstGeom prst="roundRect">
-            <a:avLst>
-              <a:gd name="adj" fmla="val 14286"/>
-            </a:avLst>
-          </a:prstGeom>
-          <a:solidFill>
             <a:schemeClr val="bg2"/>
           </a:solidFill>
           <a:ln/>
@@ -5751,7 +5692,7 @@
       </p:sp>
       <p:pic>
         <p:nvPicPr>
-          <p:cNvPr id="113" name="lane-7-chip-1" descr="/Users/a/MAI/DID-research/FIN/presentation/assets/logos/gemini.png">    </p:cNvPr>
+          <p:cNvPr id="111" name="lane-6-chip-4" descr="/Users/a/MAI/DID/presentation/assets/logos/openai.png">    </p:cNvPr>
           <p:cNvPicPr>
             <a:picLocks noChangeAspect="1"/>
           </p:cNvPicPr>
@@ -5765,7 +5706,7 @@
         </p:blipFill>
         <p:spPr>
           <a:xfrm>
-            <a:off x="4613148" y="5148725"/>
+            <a:off x="5490972" y="4665399"/>
             <a:ext cx="173736" cy="173736"/>
           </a:xfrm>
           <a:prstGeom prst="rect">
@@ -5775,13 +5716,13 @@
       </p:pic>
       <p:sp>
         <p:nvSpPr>
-          <p:cNvPr id="114" name="lane-7-chip-2-tile"/>
+          <p:cNvPr id="112" name="lane-6-chip-5-tile"/>
           <p:cNvSpPr/>
           <p:nvPr/>
         </p:nvSpPr>
         <p:spPr>
           <a:xfrm>
-            <a:off x="4864608" y="5107577"/>
+            <a:off x="5742432" y="4624251"/>
             <a:ext cx="256032" cy="256032"/>
           </a:xfrm>
           <a:prstGeom prst="roundRect">
@@ -5797,7 +5738,7 @@
       </p:sp>
       <p:pic>
         <p:nvPicPr>
-          <p:cNvPr id="115" name="lane-7-chip-2" descr="/Users/a/MAI/DID-research/FIN/presentation/assets/logos/claude.png">    </p:cNvPr>
+          <p:cNvPr id="113" name="lane-6-chip-5" descr="/Users/a/MAI/DID/presentation/assets/logos/claude.png">    </p:cNvPr>
           <p:cNvPicPr>
             <a:picLocks noChangeAspect="1"/>
           </p:cNvPicPr>
@@ -5811,7 +5752,7 @@
         </p:blipFill>
         <p:spPr>
           <a:xfrm>
-            <a:off x="4905756" y="5148725"/>
+            <a:off x="5783580" y="4665399"/>
             <a:ext cx="173736" cy="173736"/>
           </a:xfrm>
           <a:prstGeom prst="rect">
@@ -5821,13 +5762,13 @@
       </p:pic>
       <p:sp>
         <p:nvSpPr>
-          <p:cNvPr id="116" name="lane-7-chip-3-tile"/>
-          <p:cNvSpPr/>
-          <p:nvPr/>
-        </p:nvSpPr>
-        <p:spPr>
-          <a:xfrm>
-            <a:off x="5157216" y="5107577"/>
+          <p:cNvPr id="114" name="lane-6-chip-6"/>
+          <p:cNvSpPr txBox="1"/>
+          <p:nvPr/>
+        </p:nvSpPr>
+        <p:spPr>
+          <a:xfrm>
+            <a:off x="6035040" y="4624251"/>
             <a:ext cx="256032" cy="256032"/>
           </a:xfrm>
           <a:prstGeom prst="roundRect">
@@ -5836,6 +5777,141 @@
             </a:avLst>
           </a:prstGeom>
           <a:solidFill>
+            <a:schemeClr val="accent3"/>
+          </a:solidFill>
+          <a:ln/>
+        </p:spPr>
+        <p:txBody>
+          <a:bodyPr wrap="square" lIns="0" tIns="0" rIns="0" bIns="0" rtlCol="0" anchor="ctr"/>
+          <a:lstStyle/>
+          <a:p>
+            <a:pPr algn="ctr" indent="0" marL="0">
+              <a:buNone/>
+            </a:pPr>
+            <a:r>
+              <a:rPr lang="en-US" sz="1300" b="1" dirty="0">
+                <a:solidFill>
+                  <a:schemeClr val="bg1"/>
+                </a:solidFill>
+              </a:rPr>
+              <a:t>✓</a:t>
+            </a:r>
+            <a:endParaRPr lang="en-US" sz="1300" dirty="0"/>
+          </a:p>
+        </p:txBody>
+      </p:sp>
+      <p:sp>
+        <p:nvSpPr>
+          <p:cNvPr id="115" name="lane-6-result"/>
+          <p:cNvSpPr txBox="1"/>
+          <p:nvPr/>
+        </p:nvSpPr>
+        <p:spPr>
+          <a:xfrm>
+            <a:off x="7635240" y="4510605"/>
+            <a:ext cx="4005072" cy="483326"/>
+          </a:xfrm>
+          <a:prstGeom prst="rect">
+            <a:avLst/>
+          </a:prstGeom>
+          <a:noFill/>
+          <a:ln/>
+        </p:spPr>
+        <p:txBody>
+          <a:bodyPr wrap="none" lIns="0" tIns="0" rIns="0" bIns="0" rtlCol="0" anchor="ctr"/>
+          <a:lstStyle/>
+          <a:p>
+            <a:pPr algn="l" indent="0" marL="0">
+              <a:buNone/>
+            </a:pPr>
+            <a:r>
+              <a:rPr lang="en-US" sz="1400" dirty="0">
+                <a:solidFill>
+                  <a:schemeClr val="tx2"/>
+                </a:solidFill>
+              </a:rPr>
+              <a:t>против пары без связи прогон короче на 26 с</a:t>
+            </a:r>
+            <a:endParaRPr lang="en-US" sz="1400" dirty="0"/>
+          </a:p>
+        </p:txBody>
+      </p:sp>
+      <p:sp>
+        <p:nvSpPr>
+          <p:cNvPr id="116" name="lane-7-rule"/>
+          <p:cNvSpPr/>
+          <p:nvPr/>
+        </p:nvSpPr>
+        <p:spPr>
+          <a:xfrm>
+            <a:off x="548640" y="4993930"/>
+            <a:ext cx="11091672" cy="0"/>
+          </a:xfrm>
+          <a:prstGeom prst="line">
+            <a:avLst/>
+          </a:prstGeom>
+          <a:noFill/>
+          <a:ln w="12700">
+            <a:solidFill>
+              <a:schemeClr val="bg2"/>
+            </a:solidFill>
+            <a:prstDash val="solid"/>
+          </a:ln>
+        </p:spPr>
+      </p:sp>
+      <p:sp>
+        <p:nvSpPr>
+          <p:cNvPr id="117" name="lane-7-name"/>
+          <p:cNvSpPr txBox="1"/>
+          <p:nvPr/>
+        </p:nvSpPr>
+        <p:spPr>
+          <a:xfrm>
+            <a:off x="548640" y="4993930"/>
+            <a:ext cx="3931920" cy="483326"/>
+          </a:xfrm>
+          <a:prstGeom prst="rect">
+            <a:avLst/>
+          </a:prstGeom>
+          <a:noFill/>
+          <a:ln/>
+        </p:spPr>
+        <p:txBody>
+          <a:bodyPr wrap="none" lIns="0" tIns="0" rIns="0" bIns="0" rtlCol="0" anchor="ctr"/>
+          <a:lstStyle/>
+          <a:p>
+            <a:pPr algn="l" indent="0" marL="0">
+              <a:buNone/>
+            </a:pPr>
+            <a:r>
+              <a:rPr lang="en-US" sz="1600" b="1" dirty="0">
+                <a:solidFill>
+                  <a:schemeClr val="tx1"/>
+                </a:solidFill>
+              </a:rPr>
+              <a:t>F2. SLAM вместо готовой карты</a:t>
+            </a:r>
+            <a:endParaRPr lang="en-US" sz="1600" dirty="0"/>
+          </a:p>
+        </p:txBody>
+      </p:sp>
+      <p:sp>
+        <p:nvSpPr>
+          <p:cNvPr id="118" name="lane-7-chip-1-tile"/>
+          <p:cNvSpPr/>
+          <p:nvPr/>
+        </p:nvSpPr>
+        <p:spPr>
+          <a:xfrm>
+            <a:off x="4572000" y="5107577"/>
+            <a:ext cx="256032" cy="256032"/>
+          </a:xfrm>
+          <a:prstGeom prst="roundRect">
+            <a:avLst>
+              <a:gd name="adj" fmla="val 14286"/>
+            </a:avLst>
+          </a:prstGeom>
+          <a:solidFill>
             <a:schemeClr val="bg2"/>
           </a:solidFill>
           <a:ln/>
@@ -5843,7 +5919,7 @@
       </p:sp>
       <p:pic>
         <p:nvPicPr>
-          <p:cNvPr id="117" name="lane-7-chip-3" descr="/Users/a/MAI/DID-research/FIN/presentation/assets/logos/openai.png">    </p:cNvPr>
+          <p:cNvPr id="119" name="lane-7-chip-1" descr="/Users/a/MAI/DID/presentation/assets/logos/gemini.png">    </p:cNvPr>
           <p:cNvPicPr>
             <a:picLocks noChangeAspect="1"/>
           </p:cNvPicPr>
@@ -5857,7 +5933,7 @@
         </p:blipFill>
         <p:spPr>
           <a:xfrm>
-            <a:off x="5198364" y="5148725"/>
+            <a:off x="4613148" y="5148725"/>
             <a:ext cx="173736" cy="173736"/>
           </a:xfrm>
           <a:prstGeom prst="rect">
@@ -5867,13 +5943,13 @@
       </p:pic>
       <p:sp>
         <p:nvSpPr>
-          <p:cNvPr id="118" name="lane-7-chip-4-tile"/>
+          <p:cNvPr id="120" name="lane-7-chip-2-tile"/>
           <p:cNvSpPr/>
           <p:nvPr/>
         </p:nvSpPr>
         <p:spPr>
           <a:xfrm>
-            <a:off x="5449824" y="5107577"/>
+            <a:off x="4864608" y="5107577"/>
             <a:ext cx="256032" cy="256032"/>
           </a:xfrm>
           <a:prstGeom prst="roundRect">
@@ -5889,7 +5965,7 @@
       </p:sp>
       <p:pic>
         <p:nvPicPr>
-          <p:cNvPr id="119" name="lane-7-chip-4" descr="/Users/a/MAI/DID-research/FIN/presentation/assets/logos/claude.png">    </p:cNvPr>
+          <p:cNvPr id="121" name="lane-7-chip-2" descr="/Users/a/MAI/DID/presentation/assets/logos/claude.png">    </p:cNvPr>
           <p:cNvPicPr>
             <a:picLocks noChangeAspect="1"/>
           </p:cNvPicPr>
@@ -5903,7 +5979,7 @@
         </p:blipFill>
         <p:spPr>
           <a:xfrm>
-            <a:off x="5490972" y="5148725"/>
+            <a:off x="4905756" y="5148725"/>
             <a:ext cx="173736" cy="173736"/>
           </a:xfrm>
           <a:prstGeom prst="rect">
@@ -5913,13 +5989,13 @@
       </p:pic>
       <p:sp>
         <p:nvSpPr>
-          <p:cNvPr id="120" name="lane-7-chip-5-tile"/>
+          <p:cNvPr id="122" name="lane-7-chip-3-tile"/>
           <p:cNvSpPr/>
           <p:nvPr/>
         </p:nvSpPr>
         <p:spPr>
           <a:xfrm>
-            <a:off x="5742432" y="5107577"/>
+            <a:off x="5157216" y="5107577"/>
             <a:ext cx="256032" cy="256032"/>
           </a:xfrm>
           <a:prstGeom prst="roundRect">
@@ -5935,7 +6011,7 @@
       </p:sp>
       <p:pic>
         <p:nvPicPr>
-          <p:cNvPr id="121" name="lane-7-chip-5" descr="/Users/a/MAI/DID-research/FIN/presentation/assets/logos/openai.png">    </p:cNvPr>
+          <p:cNvPr id="123" name="lane-7-chip-3" descr="/Users/a/MAI/DID/presentation/assets/logos/openai.png">    </p:cNvPr>
           <p:cNvPicPr>
             <a:picLocks noChangeAspect="1"/>
           </p:cNvPicPr>
@@ -5949,7 +6025,7 @@
         </p:blipFill>
         <p:spPr>
           <a:xfrm>
-            <a:off x="5783580" y="5148725"/>
+            <a:off x="5198364" y="5148725"/>
             <a:ext cx="173736" cy="173736"/>
           </a:xfrm>
           <a:prstGeom prst="rect">
@@ -5959,13 +6035,13 @@
       </p:pic>
       <p:sp>
         <p:nvSpPr>
-          <p:cNvPr id="122" name="lane-7-chip-6-tile"/>
+          <p:cNvPr id="124" name="lane-7-chip-4-tile"/>
           <p:cNvSpPr/>
           <p:nvPr/>
         </p:nvSpPr>
         <p:spPr>
           <a:xfrm>
-            <a:off x="6035040" y="5107577"/>
+            <a:off x="5449824" y="5107577"/>
             <a:ext cx="256032" cy="256032"/>
           </a:xfrm>
           <a:prstGeom prst="roundRect">
@@ -5981,7 +6057,7 @@
       </p:sp>
       <p:pic>
         <p:nvPicPr>
-          <p:cNvPr id="123" name="lane-7-chip-6" descr="/Users/a/MAI/DID-research/FIN/presentation/assets/logos/claude.png">    </p:cNvPr>
+          <p:cNvPr id="125" name="lane-7-chip-4" descr="/Users/a/MAI/DID/presentation/assets/logos/claude.png">    </p:cNvPr>
           <p:cNvPicPr>
             <a:picLocks noChangeAspect="1"/>
           </p:cNvPicPr>
@@ -5995,7 +6071,7 @@
         </p:blipFill>
         <p:spPr>
           <a:xfrm>
-            <a:off x="6076188" y="5148725"/>
+            <a:off x="5490972" y="5148725"/>
             <a:ext cx="173736" cy="173736"/>
           </a:xfrm>
           <a:prstGeom prst="rect">
@@ -6005,13 +6081,13 @@
       </p:pic>
       <p:sp>
         <p:nvSpPr>
-          <p:cNvPr id="124" name="lane-7-chip-7-tile"/>
+          <p:cNvPr id="126" name="lane-7-chip-5-tile"/>
           <p:cNvSpPr/>
           <p:nvPr/>
         </p:nvSpPr>
         <p:spPr>
           <a:xfrm>
-            <a:off x="6327648" y="5107577"/>
+            <a:off x="5742432" y="5107577"/>
             <a:ext cx="256032" cy="256032"/>
           </a:xfrm>
           <a:prstGeom prst="roundRect">
@@ -6027,7 +6103,7 @@
       </p:sp>
       <p:pic>
         <p:nvPicPr>
-          <p:cNvPr id="125" name="lane-7-chip-7" descr="/Users/a/MAI/DID-research/FIN/presentation/assets/logos/openai.png">    </p:cNvPr>
+          <p:cNvPr id="127" name="lane-7-chip-5" descr="/Users/a/MAI/DID/presentation/assets/logos/openai.png">    </p:cNvPr>
           <p:cNvPicPr>
             <a:picLocks noChangeAspect="1"/>
           </p:cNvPicPr>
@@ -6041,7 +6117,7 @@
         </p:blipFill>
         <p:spPr>
           <a:xfrm>
-            <a:off x="6368796" y="5148725"/>
+            <a:off x="5783580" y="5148725"/>
             <a:ext cx="173736" cy="173736"/>
           </a:xfrm>
           <a:prstGeom prst="rect">
@@ -6051,13 +6127,13 @@
       </p:pic>
       <p:sp>
         <p:nvSpPr>
-          <p:cNvPr id="126" name="lane-7-chip-8"/>
-          <p:cNvSpPr txBox="1"/>
-          <p:nvPr/>
-        </p:nvSpPr>
-        <p:spPr>
-          <a:xfrm>
-            <a:off x="6620256" y="5107577"/>
+          <p:cNvPr id="128" name="lane-7-chip-6-tile"/>
+          <p:cNvSpPr/>
+          <p:nvPr/>
+        </p:nvSpPr>
+        <p:spPr>
+          <a:xfrm>
+            <a:off x="6035040" y="5107577"/>
             <a:ext cx="256032" cy="256032"/>
           </a:xfrm>
           <a:prstGeom prst="roundRect">
@@ -6066,6 +6142,98 @@
             </a:avLst>
           </a:prstGeom>
           <a:solidFill>
+            <a:schemeClr val="bg2"/>
+          </a:solidFill>
+          <a:ln/>
+        </p:spPr>
+      </p:sp>
+      <p:pic>
+        <p:nvPicPr>
+          <p:cNvPr id="129" name="lane-7-chip-6" descr="/Users/a/MAI/DID/presentation/assets/logos/claude.png">    </p:cNvPr>
+          <p:cNvPicPr>
+            <a:picLocks noChangeAspect="1"/>
+          </p:cNvPicPr>
+          <p:nvPr/>
+        </p:nvPicPr>
+        <p:blipFill>
+          <a:blip r:embed="rId43"/>
+          <a:stretch>
+            <a:fillRect/>
+          </a:stretch>
+        </p:blipFill>
+        <p:spPr>
+          <a:xfrm>
+            <a:off x="6076188" y="5148725"/>
+            <a:ext cx="173736" cy="173736"/>
+          </a:xfrm>
+          <a:prstGeom prst="rect">
+            <a:avLst/>
+          </a:prstGeom>
+        </p:spPr>
+      </p:pic>
+      <p:sp>
+        <p:nvSpPr>
+          <p:cNvPr id="130" name="lane-7-chip-7-tile"/>
+          <p:cNvSpPr/>
+          <p:nvPr/>
+        </p:nvSpPr>
+        <p:spPr>
+          <a:xfrm>
+            <a:off x="6327648" y="5107577"/>
+            <a:ext cx="256032" cy="256032"/>
+          </a:xfrm>
+          <a:prstGeom prst="roundRect">
+            <a:avLst>
+              <a:gd name="adj" fmla="val 14286"/>
+            </a:avLst>
+          </a:prstGeom>
+          <a:solidFill>
+            <a:schemeClr val="bg2"/>
+          </a:solidFill>
+          <a:ln/>
+        </p:spPr>
+      </p:sp>
+      <p:pic>
+        <p:nvPicPr>
+          <p:cNvPr id="131" name="lane-7-chip-7" descr="/Users/a/MAI/DID/presentation/assets/logos/openai.png">    </p:cNvPr>
+          <p:cNvPicPr>
+            <a:picLocks noChangeAspect="1"/>
+          </p:cNvPicPr>
+          <p:nvPr/>
+        </p:nvPicPr>
+        <p:blipFill>
+          <a:blip r:embed="rId44"/>
+          <a:stretch>
+            <a:fillRect/>
+          </a:stretch>
+        </p:blipFill>
+        <p:spPr>
+          <a:xfrm>
+            <a:off x="6368796" y="5148725"/>
+            <a:ext cx="173736" cy="173736"/>
+          </a:xfrm>
+          <a:prstGeom prst="rect">
+            <a:avLst/>
+          </a:prstGeom>
+        </p:spPr>
+      </p:pic>
+      <p:sp>
+        <p:nvSpPr>
+          <p:cNvPr id="132" name="lane-7-chip-8"/>
+          <p:cNvSpPr txBox="1"/>
+          <p:nvPr/>
+        </p:nvSpPr>
+        <p:spPr>
+          <a:xfrm>
+            <a:off x="6620256" y="5107577"/>
+            <a:ext cx="256032" cy="256032"/>
+          </a:xfrm>
+          <a:prstGeom prst="roundRect">
+            <a:avLst>
+              <a:gd name="adj" fmla="val 14286"/>
+            </a:avLst>
+          </a:prstGeom>
+          <a:solidFill>
             <a:schemeClr val="accent3"/>
           </a:solidFill>
           <a:ln/>
@@ -6091,7 +6259,7 @@
       </p:sp>
       <p:sp>
         <p:nvSpPr>
-          <p:cNvPr id="127" name="lane-7-result"/>
+          <p:cNvPr id="133" name="lane-7-result"/>
           <p:cNvSpPr txBox="1"/>
           <p:nvPr/>
         </p:nvSpPr>
@@ -6127,7 +6295,7 @@
       </p:sp>
       <p:sp>
         <p:nvSpPr>
-          <p:cNvPr id="128" name="conclusion-card"/>
+          <p:cNvPr id="134" name="conclusion-card"/>
           <p:cNvSpPr/>
           <p:nvPr/>
         </p:nvSpPr>
@@ -6149,7 +6317,7 @@
       </p:sp>
       <p:sp>
         <p:nvSpPr>
-          <p:cNvPr id="129" name="conclusion-text"/>
+          <p:cNvPr id="135" name="conclusion-text"/>
           <p:cNvSpPr txBox="1"/>
           <p:nvPr/>
         </p:nvSpPr>
@@ -6188,7 +6356,7 @@
                   <a:schemeClr val="bg1"/>
                 </a:solidFill>
               </a:rPr>
-              <a:t>27 кругов ревью по 15 работам. Ни одна работа не прошла ревью с первого раза: после первого круга всегда были исправления.</a:t>
+              <a:t>32 круга ревью по 20 работам. 19 из них ревью вернуло на исправления; с первого раза принято одно измерение без правок кода робота.</a:t>
             </a:r>
             <a:endParaRPr lang="en-US" sz="1600" dirty="0"/>
           </a:p>
@@ -6971,7 +7139,7 @@
                   <a:schemeClr val="tx2"/>
                 </a:solidFill>
               </a:rPr>
-              <a:t>Режим «ехать, пока модель думает» — только на имитаторе, по умолчанию выключен</a:t>
+              <a:t>Режим «ехать, пока модель думает»: на настоящей модели измерен на 10 сценариях; по умолчанию выключен</a:t>
             </a:r>
             <a:endParaRPr lang="en-US" sz="1500" dirty="0"/>
           </a:p>
@@ -10531,7 +10699,7 @@
                   <a:schemeClr val="tx1"/>
                 </a:solidFill>
               </a:rPr>
-              <a:t>Ехать, пока модель думает 15 с</a:t>
+              <a:t>Ехать, пока модель думает</a:t>
             </a:r>
             <a:endParaRPr lang="en-US" sz="1300" dirty="0"/>
           </a:p>
@@ -10567,7 +10735,7 @@
                   <a:schemeClr val="tx2"/>
                 </a:solidFill>
               </a:rPr>
-              <a:t>имитатор (R16), 40 сцен.</a:t>
+              <a:t>имитатор / модель, 10 сцен.</a:t>
             </a:r>
             <a:endParaRPr lang="en-US" sz="1300" dirty="0"/>
           </a:p>
@@ -10603,7 +10771,7 @@
                   <a:schemeClr val="tx2"/>
                 </a:solidFill>
               </a:rPr>
-              <a:t>30,3 → 72,3: +42,0 [+25,1; +59,6]</a:t>
+              <a:t>+42,0 [+25,1; +59,6] / +38,5 [+3,4; +79,3]</a:t>
             </a:r>
             <a:endParaRPr lang="en-US" sz="1300" dirty="0"/>
           </a:p>
@@ -11220,7 +11388,7 @@
                   <a:schemeClr val="bg1"/>
                 </a:solidFill>
               </a:rPr>
-              <a:t>Модель на показе не решает: цена ожидания (−73) и режим «ехать, пока она думает» (+42) измерены на имитаторе модели, задержка 15 с</a:t>
+              <a:t>Модель на показе не решает: цена ожидания (−73) измерена на имитаторе модели, задержка 15 с; режим «ехать, пока она думает» на настоящей модели проверен на 10 сценариях и выключен</a:t>
             </a:r>
             <a:endParaRPr lang="en-US" sz="1600" dirty="0"/>
           </a:p>
@@ -17407,7 +17575,7 @@
                   <a:schemeClr val="tx1"/>
                 </a:solidFill>
               </a:rPr>
-              <a:t>+42,0</a:t>
+              <a:t>+38,5</a:t>
             </a:r>
             <a:endParaRPr lang="en-US" sz="2200" dirty="0"/>
           </a:p>
@@ -17443,7 +17611,7 @@
                   <a:schemeClr val="tx2"/>
                 </a:solidFill>
               </a:rPr>
-              <a:t>очка [+25,1; +59,6], если ехать по правилу, пока модель думает: 30,3 → 72,3; модель влияет на 9% решений</a:t>
+              <a:t>очка [+3,4; +79,3], если ехать по правилу, пока модель думает: 34,7 → 73,2; приняты 7% её ответов</a:t>
             </a:r>
             <a:endParaRPr lang="en-US" sz="1300" dirty="0"/>
           </a:p>
@@ -17479,7 +17647,7 @@
                   <a:schemeClr val="accent5"/>
                 </a:solidFill>
               </a:rPr>
-              <a:t>на имитаторе модели, задержка 15 с · по умолчанию выключено</a:t>
+              <a:t>настоящая модель, 10 сценариев · по умолчанию выключено</a:t>
             </a:r>
             <a:endParaRPr lang="en-US" sz="1200" dirty="0"/>
           </a:p>
@@ -18998,7 +19166,7 @@
       </p:sp>
       <p:pic>
         <p:nvPicPr>
-          <p:cNvPr id="13" name="lead-logo" descr="/Users/a/MAI/DID-research/FIN/presentation/assets/logos/claude.png">    </p:cNvPr>
+          <p:cNvPr id="13" name="lead-logo" descr="/Users/a/MAI/DID/presentation/assets/logos/claude.png">    </p:cNvPr>
           <p:cNvPicPr>
             <a:picLocks noChangeAspect="1"/>
           </p:cNvPicPr>
@@ -19177,7 +19345,7 @@
       </p:sp>
       <p:pic>
         <p:nvPicPr>
-          <p:cNvPr id="19" name="role-1-logo-1" descr="/Users/a/MAI/DID-research/FIN/presentation/assets/logos/gemini.png">    </p:cNvPr>
+          <p:cNvPr id="19" name="role-1-logo-1" descr="/Users/a/MAI/DID/presentation/assets/logos/gemini.png">    </p:cNvPr>
           <p:cNvPicPr>
             <a:picLocks noChangeAspect="1"/>
           </p:cNvPicPr>
@@ -19331,7 +19499,7 @@
       </p:sp>
       <p:pic>
         <p:nvPicPr>
-          <p:cNvPr id="24" name="role-2-logo-1" descr="/Users/a/MAI/DID-research/FIN/presentation/assets/logos/claude.png">    </p:cNvPr>
+          <p:cNvPr id="24" name="role-2-logo-1" descr="/Users/a/MAI/DID/presentation/assets/logos/claude.png">    </p:cNvPr>
           <p:cNvPicPr>
             <a:picLocks noChangeAspect="1"/>
           </p:cNvPicPr>
@@ -19485,7 +19653,7 @@
       </p:sp>
       <p:pic>
         <p:nvPicPr>
-          <p:cNvPr id="29" name="role-3-logo-1" descr="/Users/a/MAI/DID-research/FIN/presentation/assets/logos/openai.png">    </p:cNvPr>
+          <p:cNvPr id="29" name="role-3-logo-1" descr="/Users/a/MAI/DID/presentation/assets/logos/openai.png">    </p:cNvPr>
           <p:cNvPicPr>
             <a:picLocks noChangeAspect="1"/>
           </p:cNvPicPr>
@@ -19639,7 +19807,7 @@
       </p:sp>
       <p:pic>
         <p:nvPicPr>
-          <p:cNvPr id="34" name="role-4-logo-1" descr="/Users/a/MAI/DID-research/FIN/presentation/assets/logos/claude.png">    </p:cNvPr>
+          <p:cNvPr id="34" name="role-4-logo-1" descr="/Users/a/MAI/DID/presentation/assets/logos/claude.png">    </p:cNvPr>
           <p:cNvPicPr>
             <a:picLocks noChangeAspect="1"/>
           </p:cNvPicPr>
@@ -19663,7 +19831,7 @@
       </p:pic>
       <p:pic>
         <p:nvPicPr>
-          <p:cNvPr id="35" name="role-4-logo-2" descr="/Users/a/MAI/DID-research/FIN/presentation/assets/logos/openai.png">    </p:cNvPr>
+          <p:cNvPr id="35" name="role-4-logo-2" descr="/Users/a/MAI/DID/presentation/assets/logos/openai.png">    </p:cNvPr>
           <p:cNvPicPr>
             <a:picLocks noChangeAspect="1"/>
           </p:cNvPicPr>
@@ -19762,7 +19930,7 @@
                   <a:schemeClr val="accent5"/>
                 </a:solidFill>
               </a:rPr>
-              <a:t>   ветка — отдельная копия кода; ревью — проверка кода другой моделью: 27 кругов по 15 работам</a:t>
+              <a:t>   ветка — отдельная копия кода; ревью — проверка кода другой моделью: 32 круга по 20 работам</a:t>
             </a:r>
             <a:endParaRPr lang="en-US" sz="1300" dirty="0"/>
           </a:p>
@@ -20540,7 +20708,7 @@
                   <a:schemeClr val="tx1"/>
                 </a:solidFill>
               </a:rPr>
-              <a:t>около 80</a:t>
+              <a:t>около 90</a:t>
             </a:r>
             <a:endParaRPr lang="en-US" sz="2800" dirty="0"/>
           </a:p>
@@ -20634,7 +20802,7 @@
                   <a:schemeClr val="tx1"/>
                 </a:solidFill>
               </a:rPr>
-              <a:t>ни одна</a:t>
+              <a:t>19 из 20</a:t>
             </a:r>
             <a:endParaRPr lang="en-US" sz="2800" dirty="0"/>
           </a:p>
@@ -20670,7 +20838,7 @@
                   <a:schemeClr val="tx2"/>
                 </a:solidFill>
               </a:rPr>
-              <a:t>работа не прошла ревью с первого раза</a:t>
+              <a:t>работ ревью вернуло на исправления</a:t>
             </a:r>
             <a:endParaRPr lang="en-US" sz="1300" dirty="0"/>
           </a:p>
@@ -20728,7 +20896,7 @@
                   <a:schemeClr val="tx1"/>
                 </a:solidFill>
               </a:rPr>
-              <a:t>253</a:t>
+              <a:t>260</a:t>
             </a:r>
             <a:endParaRPr lang="en-US" sz="2800" dirty="0"/>
           </a:p>
@@ -22065,7 +22233,7 @@
       </p:sp>
       <p:pic>
         <p:nvPicPr>
-          <p:cNvPr id="6" name="legend-1-chip" descr="/Users/a/MAI/DID-research/FIN/presentation/assets/logos/gemini.png">    </p:cNvPr>
+          <p:cNvPr id="6" name="legend-1-chip" descr="/Users/a/MAI/DID/presentation/assets/logos/gemini.png">    </p:cNvPr>
           <p:cNvPicPr>
             <a:picLocks noChangeAspect="1"/>
           </p:cNvPicPr>
@@ -22147,7 +22315,7 @@
       </p:sp>
       <p:pic>
         <p:nvPicPr>
-          <p:cNvPr id="9" name="legend-2-chip" descr="/Users/a/MAI/DID-research/FIN/presentation/assets/logos/claude.png">    </p:cNvPr>
+          <p:cNvPr id="9" name="legend-2-chip" descr="/Users/a/MAI/DID/presentation/assets/logos/claude.png">    </p:cNvPr>
           <p:cNvPicPr>
             <a:picLocks noChangeAspect="1"/>
           </p:cNvPicPr>
@@ -22229,7 +22397,7 @@
       </p:sp>
       <p:pic>
         <p:nvPicPr>
-          <p:cNvPr id="12" name="legend-3-chip" descr="/Users/a/MAI/DID-research/FIN/presentation/assets/logos/openai.png">    </p:cNvPr>
+          <p:cNvPr id="12" name="legend-3-chip" descr="/Users/a/MAI/DID/presentation/assets/logos/openai.png">    </p:cNvPr>
           <p:cNvPicPr>
             <a:picLocks noChangeAspect="1"/>
           </p:cNvPicPr>
@@ -22518,7 +22686,7 @@
       </p:sp>
       <p:pic>
         <p:nvPicPr>
-          <p:cNvPr id="21" name="lane-1-chip-1" descr="/Users/a/MAI/DID-research/FIN/presentation/assets/logos/gemini.png">    </p:cNvPr>
+          <p:cNvPr id="21" name="lane-1-chip-1" descr="/Users/a/MAI/DID/presentation/assets/logos/gemini.png">    </p:cNvPr>
           <p:cNvPicPr>
             <a:picLocks noChangeAspect="1"/>
           </p:cNvPicPr>
@@ -22564,7 +22732,7 @@
       </p:sp>
       <p:pic>
         <p:nvPicPr>
-          <p:cNvPr id="23" name="lane-1-chip-2" descr="/Users/a/MAI/DID-research/FIN/presentation/assets/logos/openai.png">    </p:cNvPr>
+          <p:cNvPr id="23" name="lane-1-chip-2" descr="/Users/a/MAI/DID/presentation/assets/logos/openai.png">    </p:cNvPr>
           <p:cNvPicPr>
             <a:picLocks noChangeAspect="1"/>
           </p:cNvPicPr>
@@ -22610,7 +22778,7 @@
       </p:sp>
       <p:pic>
         <p:nvPicPr>
-          <p:cNvPr id="25" name="lane-1-chip-3" descr="/Users/a/MAI/DID-research/FIN/presentation/assets/logos/claude.png">    </p:cNvPr>
+          <p:cNvPr id="25" name="lane-1-chip-3" descr="/Users/a/MAI/DID/presentation/assets/logos/claude.png">    </p:cNvPr>
           <p:cNvPicPr>
             <a:picLocks noChangeAspect="1"/>
           </p:cNvPicPr>
@@ -22656,7 +22824,7 @@
       </p:sp>
       <p:pic>
         <p:nvPicPr>
-          <p:cNvPr id="27" name="lane-1-chip-4" descr="/Users/a/MAI/DID-research/FIN/presentation/assets/logos/openai.png">    </p:cNvPr>
+          <p:cNvPr id="27" name="lane-1-chip-4" descr="/Users/a/MAI/DID/presentation/assets/logos/openai.png">    </p:cNvPr>
           <p:cNvPicPr>
             <a:picLocks noChangeAspect="1"/>
           </p:cNvPicPr>
@@ -22702,7 +22870,7 @@
       </p:sp>
       <p:pic>
         <p:nvPicPr>
-          <p:cNvPr id="29" name="lane-1-chip-5" descr="/Users/a/MAI/DID-research/FIN/presentation/assets/logos/claude.png">    </p:cNvPr>
+          <p:cNvPr id="29" name="lane-1-chip-5" descr="/Users/a/MAI/DID/presentation/assets/logos/claude.png">    </p:cNvPr>
           <p:cNvPicPr>
             <a:picLocks noChangeAspect="1"/>
           </p:cNvPicPr>
@@ -22748,7 +22916,7 @@
       </p:sp>
       <p:pic>
         <p:nvPicPr>
-          <p:cNvPr id="31" name="lane-1-chip-6" descr="/Users/a/MAI/DID-research/FIN/presentation/assets/logos/openai.png">    </p:cNvPr>
+          <p:cNvPr id="31" name="lane-1-chip-6" descr="/Users/a/MAI/DID/presentation/assets/logos/openai.png">    </p:cNvPr>
           <p:cNvPicPr>
             <a:picLocks noChangeAspect="1"/>
           </p:cNvPicPr>
@@ -22794,7 +22962,7 @@
       </p:sp>
       <p:pic>
         <p:nvPicPr>
-          <p:cNvPr id="33" name="lane-1-chip-7" descr="/Users/a/MAI/DID-research/FIN/presentation/assets/logos/claude.png">    </p:cNvPr>
+          <p:cNvPr id="33" name="lane-1-chip-7" descr="/Users/a/MAI/DID/presentation/assets/logos/claude.png">    </p:cNvPr>
           <p:cNvPicPr>
             <a:picLocks noChangeAspect="1"/>
           </p:cNvPicPr>
@@ -22840,7 +23008,7 @@
       </p:sp>
       <p:pic>
         <p:nvPicPr>
-          <p:cNvPr id="35" name="lane-1-chip-8" descr="/Users/a/MAI/DID-research/FIN/presentation/assets/logos/openai.png">    </p:cNvPr>
+          <p:cNvPr id="35" name="lane-1-chip-8" descr="/Users/a/MAI/DID/presentation/assets/logos/openai.png">    </p:cNvPr>
           <p:cNvPicPr>
             <a:picLocks noChangeAspect="1"/>
           </p:cNvPicPr>
@@ -22886,7 +23054,7 @@
       </p:sp>
       <p:pic>
         <p:nvPicPr>
-          <p:cNvPr id="37" name="lane-1-chip-9" descr="/Users/a/MAI/DID-research/FIN/presentation/assets/logos/claude.png">    </p:cNvPr>
+          <p:cNvPr id="37" name="lane-1-chip-9" descr="/Users/a/MAI/DID/presentation/assets/logos/claude.png">    </p:cNvPr>
           <p:cNvPicPr>
             <a:picLocks noChangeAspect="1"/>
           </p:cNvPicPr>
@@ -23067,7 +23235,7 @@
       </p:sp>
       <p:pic>
         <p:nvPicPr>
-          <p:cNvPr id="43" name="lane-2-chip-1" descr="/Users/a/MAI/DID-research/FIN/presentation/assets/logos/gemini.png">    </p:cNvPr>
+          <p:cNvPr id="43" name="lane-2-chip-1" descr="/Users/a/MAI/DID/presentation/assets/logos/gemini.png">    </p:cNvPr>
           <p:cNvPicPr>
             <a:picLocks noChangeAspect="1"/>
           </p:cNvPicPr>
@@ -23113,7 +23281,7 @@
       </p:sp>
       <p:pic>
         <p:nvPicPr>
-          <p:cNvPr id="45" name="lane-2-chip-2" descr="/Users/a/MAI/DID-research/FIN/presentation/assets/logos/gemini.png">    </p:cNvPr>
+          <p:cNvPr id="45" name="lane-2-chip-2" descr="/Users/a/MAI/DID/presentation/assets/logos/gemini.png">    </p:cNvPr>
           <p:cNvPicPr>
             <a:picLocks noChangeAspect="1"/>
           </p:cNvPicPr>
@@ -23159,7 +23327,7 @@
       </p:sp>
       <p:pic>
         <p:nvPicPr>
-          <p:cNvPr id="47" name="lane-2-chip-3" descr="/Users/a/MAI/DID-research/FIN/presentation/assets/logos/gemini.png">    </p:cNvPr>
+          <p:cNvPr id="47" name="lane-2-chip-3" descr="/Users/a/MAI/DID/presentation/assets/logos/gemini.png">    </p:cNvPr>
           <p:cNvPicPr>
             <a:picLocks noChangeAspect="1"/>
           </p:cNvPicPr>
@@ -23205,7 +23373,7 @@
       </p:sp>
       <p:pic>
         <p:nvPicPr>
-          <p:cNvPr id="49" name="lane-2-chip-4" descr="/Users/a/MAI/DID-research/FIN/presentation/assets/logos/gemini.png">    </p:cNvPr>
+          <p:cNvPr id="49" name="lane-2-chip-4" descr="/Users/a/MAI/DID/presentation/assets/logos/gemini.png">    </p:cNvPr>
           <p:cNvPicPr>
             <a:picLocks noChangeAspect="1"/>
           </p:cNvPicPr>
@@ -23251,7 +23419,7 @@
       </p:sp>
       <p:pic>
         <p:nvPicPr>
-          <p:cNvPr id="51" name="lane-2-chip-5" descr="/Users/a/MAI/DID-research/FIN/presentation/assets/logos/claude.png">    </p:cNvPr>
+          <p:cNvPr id="51" name="lane-2-chip-5" descr="/Users/a/MAI/DID/presentation/assets/logos/claude.png">    </p:cNvPr>
           <p:cNvPicPr>
             <a:picLocks noChangeAspect="1"/>
           </p:cNvPicPr>
@@ -23432,7 +23600,7 @@
       </p:sp>
       <p:pic>
         <p:nvPicPr>
-          <p:cNvPr id="57" name="lane-3-chip-1" descr="/Users/a/MAI/DID-research/FIN/presentation/assets/logos/claude.png">    </p:cNvPr>
+          <p:cNvPr id="57" name="lane-3-chip-1" descr="/Users/a/MAI/DID/presentation/assets/logos/claude.png">    </p:cNvPr>
           <p:cNvPicPr>
             <a:picLocks noChangeAspect="1"/>
           </p:cNvPicPr>
@@ -23478,7 +23646,7 @@
       </p:sp>
       <p:pic>
         <p:nvPicPr>
-          <p:cNvPr id="59" name="lane-3-chip-2" descr="/Users/a/MAI/DID-research/FIN/presentation/assets/logos/openai.png">    </p:cNvPr>
+          <p:cNvPr id="59" name="lane-3-chip-2" descr="/Users/a/MAI/DID/presentation/assets/logos/openai.png">    </p:cNvPr>
           <p:cNvPicPr>
             <a:picLocks noChangeAspect="1"/>
           </p:cNvPicPr>
@@ -23524,7 +23692,7 @@
       </p:sp>
       <p:pic>
         <p:nvPicPr>
-          <p:cNvPr id="61" name="lane-3-chip-3" descr="/Users/a/MAI/DID-research/FIN/presentation/assets/logos/claude.png">    </p:cNvPr>
+          <p:cNvPr id="61" name="lane-3-chip-3" descr="/Users/a/MAI/DID/presentation/assets/logos/claude.png">    </p:cNvPr>
           <p:cNvPicPr>
             <a:picLocks noChangeAspect="1"/>
           </p:cNvPicPr>
@@ -23570,7 +23738,7 @@
       </p:sp>
       <p:pic>
         <p:nvPicPr>
-          <p:cNvPr id="63" name="lane-3-chip-4" descr="/Users/a/MAI/DID-research/FIN/presentation/assets/logos/openai.png">    </p:cNvPr>
+          <p:cNvPr id="63" name="lane-3-chip-4" descr="/Users/a/MAI/DID/presentation/assets/logos/openai.png">    </p:cNvPr>
           <p:cNvPicPr>
             <a:picLocks noChangeAspect="1"/>
           </p:cNvPicPr>
@@ -23692,7 +23860,7 @@
       </p:sp>
       <p:pic>
         <p:nvPicPr>
-          <p:cNvPr id="67" name="lane-3-chip-7" descr="/Users/a/MAI/DID-research/FIN/presentation/assets/logos/claude.png">    </p:cNvPr>
+          <p:cNvPr id="67" name="lane-3-chip-7" descr="/Users/a/MAI/DID/presentation/assets/logos/claude.png">    </p:cNvPr>
           <p:cNvPicPr>
             <a:picLocks noChangeAspect="1"/>
           </p:cNvPicPr>
@@ -23738,7 +23906,7 @@
       </p:sp>
       <p:pic>
         <p:nvPicPr>
-          <p:cNvPr id="69" name="lane-3-chip-8" descr="/Users/a/MAI/DID-research/FIN/presentation/assets/logos/openai.png">    </p:cNvPr>
+          <p:cNvPr id="69" name="lane-3-chip-8" descr="/Users/a/MAI/DID/presentation/assets/logos/openai.png">    </p:cNvPr>
           <p:cNvPicPr>
             <a:picLocks noChangeAspect="1"/>
           </p:cNvPicPr>
@@ -23784,7 +23952,7 @@
       </p:sp>
       <p:pic>
         <p:nvPicPr>
-          <p:cNvPr id="71" name="lane-3-chip-9" descr="/Users/a/MAI/DID-research/FIN/presentation/assets/logos/claude.png">    </p:cNvPr>
+          <p:cNvPr id="71" name="lane-3-chip-9" descr="/Users/a/MAI/DID/presentation/assets/logos/claude.png">    </p:cNvPr>
           <p:cNvPicPr>
             <a:picLocks noChangeAspect="1"/>
           </p:cNvPicPr>
@@ -23965,7 +24133,7 @@
       </p:sp>
       <p:pic>
         <p:nvPicPr>
-          <p:cNvPr id="77" name="lane-4-chip-1" descr="/Users/a/MAI/DID-research/FIN/presentation/assets/logos/claude.png">    </p:cNvPr>
+          <p:cNvPr id="77" name="lane-4-chip-1" descr="/Users/a/MAI/DID/presentation/assets/logos/claude.png">    </p:cNvPr>
           <p:cNvPicPr>
             <a:picLocks noChangeAspect="1"/>
           </p:cNvPicPr>
@@ -24011,7 +24179,7 @@
       </p:sp>
       <p:pic>
         <p:nvPicPr>
-          <p:cNvPr id="79" name="lane-4-chip-2" descr="/Users/a/MAI/DID-research/FIN/presentation/assets/logos/openai.png">    </p:cNvPr>
+          <p:cNvPr id="79" name="lane-4-chip-2" descr="/Users/a/MAI/DID/presentation/assets/logos/openai.png">    </p:cNvPr>
           <p:cNvPicPr>
             <a:picLocks noChangeAspect="1"/>
           </p:cNvPicPr>
@@ -24057,7 +24225,7 @@
       </p:sp>
       <p:pic>
         <p:nvPicPr>
-          <p:cNvPr id="81" name="lane-4-chip-3" descr="/Users/a/MAI/DID-research/FIN/presentation/assets/logos/claude.png">    </p:cNvPr>
+          <p:cNvPr id="81" name="lane-4-chip-3" descr="/Users/a/MAI/DID/presentation/assets/logos/claude.png">    </p:cNvPr>
           <p:cNvPicPr>
             <a:picLocks noChangeAspect="1"/>
           </p:cNvPicPr>
@@ -24238,7 +24406,7 @@
       </p:sp>
       <p:pic>
         <p:nvPicPr>
-          <p:cNvPr id="87" name="lane-5-chip-1" descr="/Users/a/MAI/DID-research/FIN/presentation/assets/logos/claude.png">    </p:cNvPr>
+          <p:cNvPr id="87" name="lane-5-chip-1" descr="/Users/a/MAI/DID/presentation/assets/logos/claude.png">    </p:cNvPr>
           <p:cNvPicPr>
             <a:picLocks noChangeAspect="1"/>
           </p:cNvPicPr>
@@ -24284,7 +24452,7 @@
       </p:sp>
       <p:pic>
         <p:nvPicPr>
-          <p:cNvPr id="89" name="lane-5-chip-2" descr="/Users/a/MAI/DID-research/FIN/presentation/assets/logos/openai.png">    </p:cNvPr>
+          <p:cNvPr id="89" name="lane-5-chip-2" descr="/Users/a/MAI/DID/presentation/assets/logos/openai.png">    </p:cNvPr>
           <p:cNvPicPr>
             <a:picLocks noChangeAspect="1"/>
           </p:cNvPicPr>
@@ -24330,7 +24498,7 @@
       </p:sp>
       <p:pic>
         <p:nvPicPr>
-          <p:cNvPr id="91" name="lane-5-chip-3" descr="/Users/a/MAI/DID-research/FIN/presentation/assets/logos/claude.png">    </p:cNvPr>
+          <p:cNvPr id="91" name="lane-5-chip-3" descr="/Users/a/MAI/DID/presentation/assets/logos/claude.png">    </p:cNvPr>
           <p:cNvPicPr>
             <a:picLocks noChangeAspect="1"/>
           </p:cNvPicPr>
@@ -24376,7 +24544,7 @@
       </p:sp>
       <p:pic>
         <p:nvPicPr>
-          <p:cNvPr id="93" name="lane-5-chip-4" descr="/Users/a/MAI/DID-research/FIN/presentation/assets/logos/openai.png">    </p:cNvPr>
+          <p:cNvPr id="93" name="lane-5-chip-4" descr="/Users/a/MAI/DID/presentation/assets/logos/openai.png">    </p:cNvPr>
           <p:cNvPicPr>
             <a:picLocks noChangeAspect="1"/>
           </p:cNvPicPr>
@@ -24557,7 +24725,7 @@
       </p:sp>
       <p:pic>
         <p:nvPicPr>
-          <p:cNvPr id="99" name="lane-6-chip-1" descr="/Users/a/MAI/DID-research/FIN/presentation/assets/logos/claude.png">    </p:cNvPr>
+          <p:cNvPr id="99" name="lane-6-chip-1" descr="/Users/a/MAI/DID/presentation/assets/logos/claude.png">    </p:cNvPr>
           <p:cNvPicPr>
             <a:picLocks noChangeAspect="1"/>
           </p:cNvPicPr>
@@ -24603,7 +24771,7 @@
       </p:sp>
       <p:pic>
         <p:nvPicPr>
-          <p:cNvPr id="101" name="lane-6-chip-2" descr="/Users/a/MAI/DID-research/FIN/presentation/assets/logos/openai.png">    </p:cNvPr>
+          <p:cNvPr id="101" name="lane-6-chip-2" descr="/Users/a/MAI/DID/presentation/assets/logos/openai.png">    </p:cNvPr>
           <p:cNvPicPr>
             <a:picLocks noChangeAspect="1"/>
           </p:cNvPicPr>
@@ -24649,7 +24817,7 @@
       </p:sp>
       <p:pic>
         <p:nvPicPr>
-          <p:cNvPr id="103" name="lane-6-chip-3" descr="/Users/a/MAI/DID-research/FIN/presentation/assets/logos/claude.png">    </p:cNvPr>
+          <p:cNvPr id="103" name="lane-6-chip-3" descr="/Users/a/MAI/DID/presentation/assets/logos/claude.png">    </p:cNvPr>
           <p:cNvPicPr>
             <a:picLocks noChangeAspect="1"/>
           </p:cNvPicPr>
@@ -24830,7 +24998,7 @@
       </p:sp>
       <p:pic>
         <p:nvPicPr>
-          <p:cNvPr id="109" name="lane-7-chip-1" descr="/Users/a/MAI/DID-research/FIN/presentation/assets/logos/claude.png">    </p:cNvPr>
+          <p:cNvPr id="109" name="lane-7-chip-1" descr="/Users/a/MAI/DID/presentation/assets/logos/claude.png">    </p:cNvPr>
           <p:cNvPicPr>
             <a:picLocks noChangeAspect="1"/>
           </p:cNvPicPr>
@@ -24876,7 +25044,7 @@
       </p:sp>
       <p:pic>
         <p:nvPicPr>
-          <p:cNvPr id="111" name="lane-7-chip-2" descr="/Users/a/MAI/DID-research/FIN/presentation/assets/logos/openai.png">    </p:cNvPr>
+          <p:cNvPr id="111" name="lane-7-chip-2" descr="/Users/a/MAI/DID/presentation/assets/logos/openai.png">    </p:cNvPr>
           <p:cNvPicPr>
             <a:picLocks noChangeAspect="1"/>
           </p:cNvPicPr>
@@ -24922,7 +25090,7 @@
       </p:sp>
       <p:pic>
         <p:nvPicPr>
-          <p:cNvPr id="113" name="lane-7-chip-3" descr="/Users/a/MAI/DID-research/FIN/presentation/assets/logos/claude.png">    </p:cNvPr>
+          <p:cNvPr id="113" name="lane-7-chip-3" descr="/Users/a/MAI/DID/presentation/assets/logos/claude.png">    </p:cNvPr>
           <p:cNvPicPr>
             <a:picLocks noChangeAspect="1"/>
           </p:cNvPicPr>
@@ -24968,7 +25136,7 @@
       </p:sp>
       <p:pic>
         <p:nvPicPr>
-          <p:cNvPr id="115" name="lane-7-chip-4" descr="/Users/a/MAI/DID-research/FIN/presentation/assets/logos/openai.png">    </p:cNvPr>
+          <p:cNvPr id="115" name="lane-7-chip-4" descr="/Users/a/MAI/DID/presentation/assets/logos/openai.png">    </p:cNvPr>
           <p:cNvPicPr>
             <a:picLocks noChangeAspect="1"/>
           </p:cNvPicPr>
@@ -25014,7 +25182,7 @@
       </p:sp>
       <p:pic>
         <p:nvPicPr>
-          <p:cNvPr id="117" name="lane-7-chip-5" descr="/Users/a/MAI/DID-research/FIN/presentation/assets/logos/claude.png">    </p:cNvPr>
+          <p:cNvPr id="117" name="lane-7-chip-5" descr="/Users/a/MAI/DID/presentation/assets/logos/claude.png">    </p:cNvPr>
           <p:cNvPicPr>
             <a:picLocks noChangeAspect="1"/>
           </p:cNvPicPr>

--- a/presentation/final.pptx
+++ b/presentation/final.pptx
@@ -121,7 +121,7 @@
   <p:extLst>
     <p:ext uri="{521415D9-36F7-43E2-AB2F-B90AF26B5E84}">
       <p14:sectionLst xmlns:p14="http://schemas.microsoft.com/office/powerpoint/2010/main">
-        <p14:section name="Выступление" id="{225e0957-a9f8-4863-eb68-50c47ef2a6c4}">
+        <p14:section name="Выступление" id="{ed795cfe-d202-7762-9e1e-2e66190d6083}">
           <p14:sldIdLst>
             <p14:sldId id="256"/>
             <p14:sldId id="257"/>
@@ -133,7 +133,7 @@
             <p14:sldId id="263"/>
           </p14:sldIdLst>
         </p14:section>
-        <p14:section name="Приложение: к вопросам жюри" id="{09e55228-0d45-3fa2-94cf-608e8969a91b}">
+        <p14:section name="Приложение: к вопросам жюри" id="{046552cb-6971-035b-889b-d24faf936e0c}">
           <p14:sldIdLst>
             <p14:sldId id="264"/>
             <p14:sldId id="265"/>
@@ -636,7 +636,7 @@
           <a:p>
             <a:r>
               <a:rPr lang="en-US" dirty="0"/>
-              <a:t>Продолжение: защита в Gazebo, языковая модель и бонусные треки. Последний значок инженера перед галочкой — правка ведущего агента. Всего 32 круга ревью по 20 работам; 19 из них ревью вернуло на исправления.</a:t>
+              <a:t>Продолжение: защита в Gazebo, языковая модель и бонусные треки. Последний значок инженера перед галочкой — правка ведущего агента. Всего 34 круга ревью по 20 работам; 19 из них ревью вернуло на исправления.</a:t>
             </a:r>
             <a:endParaRPr lang="en-US" dirty="0"/>
           </a:p>
@@ -6356,7 +6356,7 @@
                   <a:schemeClr val="bg1"/>
                 </a:solidFill>
               </a:rPr>
-              <a:t>32 круга ревью по 20 работам. 19 из них ревью вернуло на исправления; с первого раза принято одно измерение без правок кода робота.</a:t>
+              <a:t>34 круга ревью по 20 работам. 19 из них ревью вернуло на исправления; с первого раза принято одно измерение без правок кода робота.</a:t>
             </a:r>
             <a:endParaRPr lang="en-US" sz="1600" dirty="0"/>
           </a:p>
@@ -8346,7 +8346,7 @@
                   <a:schemeClr val="tx2"/>
                 </a:solidFill>
               </a:rPr>
-              <a:t>982 автоматические проверки; показ и серии опытов — одной командой; репетиция показа проведена</a:t>
+              <a:t>1022 автоматические проверки; показ и серии опытов — одной командой; репетиция показа проведена</a:t>
             </a:r>
             <a:endParaRPr lang="en-US" sz="1400" dirty="0"/>
           </a:p>
@@ -12883,7 +12883,7 @@
                   <a:schemeClr val="tx2"/>
                 </a:solidFill>
               </a:rPr>
-              <a:t>33 серии на одинаковых сценариях; разности с интервалами</a:t>
+              <a:t>41 серия на одинаковых сценариях; разности с интервалами</a:t>
             </a:r>
             <a:endParaRPr lang="en-US" sz="1400" dirty="0"/>
           </a:p>
@@ -19930,7 +19930,7 @@
                   <a:schemeClr val="accent5"/>
                 </a:solidFill>
               </a:rPr>
-              <a:t>   ветка — отдельная копия кода; ревью — проверка кода другой моделью: 32 круга по 20 работам</a:t>
+              <a:t>   ветка — отдельная копия кода; ревью — проверка кода другой моделью: 34 круга по 20 работам</a:t>
             </a:r>
             <a:endParaRPr lang="en-US" sz="1300" dirty="0"/>
           </a:p>
@@ -20896,7 +20896,7 @@
                   <a:schemeClr val="tx1"/>
                 </a:solidFill>
               </a:rPr>
-              <a:t>260</a:t>
+              <a:t>279</a:t>
             </a:r>
             <a:endParaRPr lang="en-US" sz="2800" dirty="0"/>
           </a:p>
@@ -20968,7 +20968,7 @@
                   <a:schemeClr val="tx1"/>
                 </a:solidFill>
               </a:rPr>
-              <a:t>982</a:t>
+              <a:t>1022</a:t>
             </a:r>
             <a:endParaRPr lang="en-US" sz="2800" dirty="0"/>
           </a:p>
@@ -21040,7 +21040,7 @@
                   <a:schemeClr val="tx1"/>
                 </a:solidFill>
               </a:rPr>
-              <a:t>24 000+</a:t>
+              <a:t>30 000+</a:t>
             </a:r>
             <a:endParaRPr lang="en-US" sz="2800" dirty="0"/>
           </a:p>
@@ -21390,7 +21390,7 @@
                   <a:schemeClr val="tx2"/>
                 </a:solidFill>
               </a:rPr>
-              <a:t>одна команда → серия → разность с интервалом; 33 серии, более 24 тысяч прогонов</a:t>
+              <a:t>одна команда → серия → разность с интервалом; 41 серия, более 30 тысяч прогонов</a:t>
             </a:r>
             <a:endParaRPr lang="en-US" sz="1300" dirty="0"/>
           </a:p>
